--- a/docs/DB贯标助手产品演示.pptx
+++ b/docs/DB贯标助手产品演示.pptx
@@ -16,9 +16,10 @@
     <p:sldId id="264" r:id="rId10"/>
     <p:sldId id="265" r:id="rId11"/>
     <p:sldId id="266" r:id="rId12"/>
+    <p:sldId id="267" r:id="rId13"/>
   </p:sldIdLst>
   <p:notesMasterIdLst>
-    <p:notesMasterId r:id="rId13"/>
+    <p:notesMasterId r:id="rId14"/>
   </p:notesMasterIdLst>
   <p:sldSz cx="9144000" cy="5143500"/>
   <p:notesSz cx="5143500" cy="9144000"/>
@@ -730,6 +731,94 @@
 </p:notes>
 </file>
 
+<file path=ppt/notesSlides/notesSlide12.xml><?xml version="1.0" encoding="utf-8"?>
+<p:notes xmlns:a="http://schemas.openxmlformats.org/drawingml/2006/main" xmlns:r="http://schemas.openxmlformats.org/officeDocument/2006/relationships" xmlns:p="http://schemas.openxmlformats.org/presentationml/2006/main">
+  <p:cSld>
+    <p:spTree>
+      <p:nvGrpSpPr>
+        <p:cNvPr id="1" name=""/>
+        <p:cNvGrpSpPr/>
+        <p:nvPr/>
+      </p:nvGrpSpPr>
+      <p:grpSpPr>
+        <a:xfrm>
+          <a:off x="0" y="0"/>
+          <a:ext cx="0" cy="0"/>
+          <a:chOff x="0" y="0"/>
+          <a:chExt cx="0" cy="0"/>
+        </a:xfrm>
+      </p:grpSpPr>
+      <p:sp>
+        <p:nvSpPr>
+          <p:cNvPr id="2" name="Slide Image Placeholder 1"/>
+          <p:cNvSpPr>
+            <a:spLocks noGrp="1" noRot="1" noChangeAspect="1"/>
+          </p:cNvSpPr>
+          <p:nvPr>
+            <p:ph type="sldImg"/>
+          </p:nvPr>
+        </p:nvSpPr>
+        <p:spPr/>
+      </p:sp>
+      <p:sp>
+        <p:nvSpPr>
+          <p:cNvPr id="3" name="Notes Placeholder 2"/>
+          <p:cNvSpPr>
+            <a:spLocks noGrp="1"/>
+          </p:cNvSpPr>
+          <p:nvPr>
+            <p:ph type="body" idx="1"/>
+          </p:nvPr>
+        </p:nvSpPr>
+        <p:spPr/>
+        <p:txBody>
+          <a:bodyPr/>
+          <a:lstStyle/>
+          <a:p>
+            <a:r>
+              <a:rPr lang="en-US" dirty="0"/>
+              <a:t/>
+            </a:r>
+            <a:endParaRPr lang="en-US" dirty="0"/>
+          </a:p>
+        </p:txBody>
+      </p:sp>
+      <p:sp>
+        <p:nvSpPr>
+          <p:cNvPr id="4" name="Slide Number Placeholder 3"/>
+          <p:cNvSpPr>
+            <a:spLocks noGrp="1"/>
+          </p:cNvSpPr>
+          <p:nvPr>
+            <p:ph type="sldNum" sz="quarter" idx="10"/>
+          </p:nvPr>
+        </p:nvSpPr>
+        <p:spPr/>
+        <p:txBody>
+          <a:bodyPr/>
+          <a:lstStyle/>
+          <a:p>
+            <a:fld id="{F7021451-1387-4CA6-816F-3879F97B5CBC}" type="slidenum">
+              <a:rPr lang="en-US"/>
+              <a:t>12</a:t>
+            </a:fld>
+            <a:endParaRPr lang="en-US"/>
+          </a:p>
+        </p:txBody>
+      </p:sp>
+    </p:spTree>
+    <p:extLst>
+      <p:ext uri="{BB962C8B-B14F-4D97-AF65-F5344CB8AC3E}">
+        <p14:creationId xmlns:p14="http://schemas.microsoft.com/office/powerpoint/2010/main" val="1024086991"/>
+      </p:ext>
+    </p:extLst>
+  </p:cSld>
+  <p:clrMapOvr>
+    <a:masterClrMapping/>
+  </p:clrMapOvr>
+</p:notes>
+</file>
+
 <file path=ppt/notesSlides/notesSlide2.xml><?xml version="1.0" encoding="utf-8"?>
 <p:notes xmlns:a="http://schemas.openxmlformats.org/drawingml/2006/main" xmlns:r="http://schemas.openxmlformats.org/officeDocument/2006/relationships" xmlns:p="http://schemas.openxmlformats.org/presentationml/2006/main">
   <p:cSld>
@@ -2016,45 +2105,6 @@
           </a:p>
         </p:txBody>
       </p:sp>
-      <p:sp>
-        <p:nvSpPr>
-          <p:cNvPr id="10" name="Text 7"/>
-          <p:cNvSpPr/>
-          <p:nvPr/>
-        </p:nvSpPr>
-        <p:spPr>
-          <a:xfrm>
-            <a:off x="1097280" y="3931920"/>
-            <a:ext cx="3657600" cy="365760"/>
-          </a:xfrm>
-          <a:prstGeom prst="rect">
-            <a:avLst/>
-          </a:prstGeom>
-          <a:noFill/>
-          <a:ln/>
-        </p:spPr>
-        <p:txBody>
-          <a:bodyPr wrap="square" lIns="0" tIns="0" rIns="0" bIns="0" rtlCol="0" anchor="ctr"/>
-          <a:lstStyle/>
-          <a:p>
-            <a:pPr indent="0" marL="0">
-              <a:buNone/>
-            </a:pPr>
-            <a:r>
-              <a:rPr lang="en-US" sz="1100" dirty="0">
-                <a:solidFill>
-                  <a:srgbClr val="94A3B8"/>
-                </a:solidFill>
-                <a:latin typeface="Arial" pitchFamily="34" charset="0"/>
-                <a:ea typeface="Arial" pitchFamily="34" charset="-122"/>
-                <a:cs typeface="Arial" pitchFamily="34" charset="-120"/>
-              </a:rPr>
-              <a:t>CodeBuddy Agent SDK  |  React + Electron</a:t>
-            </a:r>
-            <a:endParaRPr lang="en-US" sz="1100" dirty="0"/>
-          </a:p>
-        </p:txBody>
-      </p:sp>
     </p:spTree>
   </p:cSld>
   <p:clrMapOvr>
@@ -2102,7 +2152,7 @@
             <a:avLst/>
           </a:prstGeom>
           <a:solidFill>
-            <a:srgbClr val="EA580C"/>
+            <a:srgbClr val="7C3AED"/>
           </a:solidFill>
           <a:ln/>
         </p:spPr>
@@ -2140,7 +2190,7 @@
                 <a:ea typeface="Arial Black" pitchFamily="34" charset="-122"/>
                 <a:cs typeface="Arial Black" pitchFamily="34" charset="-120"/>
               </a:rPr>
-              <a:t>技术架构</a:t>
+              <a:t>其他检测模式</a:t>
             </a:r>
             <a:endParaRPr lang="en-US" sz="2800" dirty="0"/>
           </a:p>
@@ -2177,12 +2227,12 @@
         </p:nvSpPr>
         <p:spPr>
           <a:xfrm>
-            <a:off x="731520" y="1188720"/>
-            <a:ext cx="7680960" cy="640080"/>
+            <a:off x="731520" y="1097280"/>
+            <a:ext cx="3886200" cy="3474720"/>
           </a:xfrm>
           <a:prstGeom prst="rect">
             <a:avLst>
-              <a:gd name="adj" fmla="val 11429"/>
+              <a:gd name="adj" fmla="val 2105"/>
             </a:avLst>
           </a:prstGeom>
           <a:solidFill>
@@ -2206,48 +2256,28 @@
         </p:nvSpPr>
         <p:spPr>
           <a:xfrm>
-            <a:off x="731520" y="1188720"/>
-            <a:ext cx="91440" cy="640080"/>
-          </a:xfrm>
-          <a:prstGeom prst="rect">
-            <a:avLst/>
-          </a:prstGeom>
-          <a:solidFill>
-            <a:srgbClr val="0D9488"/>
-          </a:solidFill>
-          <a:ln/>
-        </p:spPr>
-      </p:sp>
-      <p:sp>
-        <p:nvSpPr>
-          <p:cNvPr id="7" name="Shape 5"/>
-          <p:cNvSpPr/>
-          <p:nvPr/>
-        </p:nvSpPr>
-        <p:spPr>
-          <a:xfrm>
-            <a:off x="1097280" y="1280160"/>
-            <a:ext cx="411480" cy="411480"/>
-          </a:xfrm>
-          <a:prstGeom prst="ellipse">
-            <a:avLst/>
-          </a:prstGeom>
-          <a:solidFill>
-            <a:srgbClr val="0D9488"/>
-          </a:solidFill>
-          <a:ln/>
-        </p:spPr>
-      </p:sp>
-      <p:sp>
-        <p:nvSpPr>
-          <p:cNvPr id="8" name="Text 6"/>
-          <p:cNvSpPr/>
-          <p:nvPr/>
-        </p:nvSpPr>
-        <p:spPr>
-          <a:xfrm>
-            <a:off x="1097280" y="1280160"/>
-            <a:ext cx="411480" cy="411480"/>
+            <a:off x="731520" y="1097280"/>
+            <a:ext cx="3886200" cy="54864"/>
+          </a:xfrm>
+          <a:prstGeom prst="rect">
+            <a:avLst/>
+          </a:prstGeom>
+          <a:solidFill>
+            <a:srgbClr val="7C3AED"/>
+          </a:solidFill>
+          <a:ln/>
+        </p:spPr>
+      </p:sp>
+      <p:sp>
+        <p:nvSpPr>
+          <p:cNvPr id="7" name="Text 5"/>
+          <p:cNvSpPr/>
+          <p:nvPr/>
+        </p:nvSpPr>
+        <p:spPr>
+          <a:xfrm>
+            <a:off x="868680" y="1188720"/>
+            <a:ext cx="3566160" cy="320040"/>
           </a:xfrm>
           <a:prstGeom prst="rect">
             <a:avLst/>
@@ -2259,34 +2289,58 @@
           <a:bodyPr wrap="square" lIns="0" tIns="0" rIns="0" bIns="0" rtlCol="0" anchor="ctr"/>
           <a:lstStyle/>
           <a:p>
-            <a:pPr algn="ctr" indent="0" marL="0">
-              <a:buNone/>
-            </a:pPr>
-            <a:r>
-              <a:rPr lang="en-US" sz="1400" b="1" dirty="0">
-                <a:solidFill>
-                  <a:srgbClr val="FFFFFF"/>
+            <a:pPr indent="0" marL="0">
+              <a:buNone/>
+            </a:pPr>
+            <a:r>
+              <a:rPr lang="en-US" sz="1600" b="1" dirty="0">
+                <a:solidFill>
+                  <a:srgbClr val="7C3AED"/>
                 </a:solidFill>
                 <a:latin typeface="Arial" pitchFamily="34" charset="0"/>
                 <a:ea typeface="Arial" pitchFamily="34" charset="-122"/>
                 <a:cs typeface="Arial" pitchFamily="34" charset="-120"/>
               </a:rPr>
-              <a:t>1</a:t>
-            </a:r>
-            <a:endParaRPr lang="en-US" sz="1400" dirty="0"/>
-          </a:p>
-        </p:txBody>
-      </p:sp>
-      <p:sp>
-        <p:nvSpPr>
-          <p:cNvPr id="9" name="Text 7"/>
-          <p:cNvSpPr/>
-          <p:nvPr/>
-        </p:nvSpPr>
-        <p:spPr>
-          <a:xfrm>
-            <a:off x="1691640" y="1188720"/>
-            <a:ext cx="1097280" cy="640080"/>
+              <a:t>贯标规则配置</a:t>
+            </a:r>
+            <a:endParaRPr lang="en-US" sz="1600" dirty="0"/>
+          </a:p>
+        </p:txBody>
+      </p:sp>
+      <p:pic>
+        <p:nvPicPr>
+          <p:cNvPr id="8" name="Image 0" descr="preencoded.png">    </p:cNvPr>
+          <p:cNvPicPr>
+            <a:picLocks noChangeAspect="1"/>
+          </p:cNvPicPr>
+          <p:nvPr/>
+        </p:nvPicPr>
+        <p:blipFill>
+          <a:blip r:embed="rId1"/>
+          <a:stretch>
+            <a:fillRect/>
+          </a:stretch>
+        </p:blipFill>
+        <p:spPr>
+          <a:xfrm>
+            <a:off x="868680" y="1600200"/>
+            <a:ext cx="3566160" cy="2103120"/>
+          </a:xfrm>
+          <a:prstGeom prst="ellipse">
+            <a:avLst/>
+          </a:prstGeom>
+        </p:spPr>
+      </p:pic>
+      <p:sp>
+        <p:nvSpPr>
+          <p:cNvPr id="9" name="Text 6"/>
+          <p:cNvSpPr/>
+          <p:nvPr/>
+        </p:nvSpPr>
+        <p:spPr>
+          <a:xfrm>
+            <a:off x="868680" y="3794760"/>
+            <a:ext cx="3566160" cy="548640"/>
           </a:xfrm>
           <a:prstGeom prst="rect">
             <a:avLst/>
@@ -2302,46 +2356,24 @@
               <a:buNone/>
             </a:pPr>
             <a:r>
-              <a:rPr lang="en-US" sz="1400" b="1" dirty="0">
-                <a:solidFill>
-                  <a:srgbClr val="0D9488"/>
+              <a:rPr lang="en-US" sz="1100" dirty="0">
+                <a:solidFill>
+                  <a:srgbClr val="CBD5E1"/>
                 </a:solidFill>
                 <a:latin typeface="Arial" pitchFamily="34" charset="0"/>
                 <a:ea typeface="Arial" pitchFamily="34" charset="-122"/>
                 <a:cs typeface="Arial" pitchFamily="34" charset="-120"/>
               </a:rPr>
-              <a:t>前端层</a:t>
-            </a:r>
-            <a:endParaRPr lang="en-US" sz="1400" dirty="0"/>
-          </a:p>
-        </p:txBody>
-      </p:sp>
-      <p:sp>
-        <p:nvSpPr>
-          <p:cNvPr id="10" name="Text 8"/>
-          <p:cNvSpPr/>
-          <p:nvPr/>
-        </p:nvSpPr>
-        <p:spPr>
-          <a:xfrm>
-            <a:off x="2834640" y="1188720"/>
-            <a:ext cx="5303520" cy="640080"/>
-          </a:xfrm>
-          <a:prstGeom prst="rect">
-            <a:avLst/>
-          </a:prstGeom>
-          <a:noFill/>
-          <a:ln/>
-        </p:spPr>
-        <p:txBody>
-          <a:bodyPr wrap="square" lIns="0" tIns="0" rIns="0" bIns="0" rtlCol="0" anchor="ctr"/>
-          <a:lstStyle/>
-          <a:p>
-            <a:pPr indent="0" marL="0">
-              <a:buNone/>
-            </a:pPr>
-            <a:r>
-              <a:rPr lang="en-US" sz="1200" dirty="0">
+              <a:t>自定义检测规则体系</a:t>
+            </a:r>
+            <a:endParaRPr lang="en-US" sz="1100" dirty="0"/>
+          </a:p>
+          <a:p>
+            <a:pPr indent="0" marL="0">
+              <a:buNone/>
+            </a:pPr>
+            <a:r>
+              <a:rPr lang="en-US" sz="1100" dirty="0">
                 <a:solidFill>
                   <a:srgbClr val="CBD5E1"/>
                 </a:solidFill>
@@ -2349,26 +2381,26 @@
                 <a:ea typeface="Arial" pitchFamily="34" charset="-122"/>
                 <a:cs typeface="Arial" pitchFamily="34" charset="-120"/>
               </a:rPr>
-              <a:t>React 18 + TypeScript + Vite 5 + TDesign + Tailwind</a:t>
-            </a:r>
-            <a:endParaRPr lang="en-US" sz="1200" dirty="0"/>
-          </a:p>
-        </p:txBody>
-      </p:sp>
-      <p:sp>
-        <p:nvSpPr>
-          <p:cNvPr id="11" name="Shape 9"/>
-          <p:cNvSpPr/>
-          <p:nvPr/>
-        </p:nvSpPr>
-        <p:spPr>
-          <a:xfrm>
-            <a:off x="731520" y="1965960"/>
-            <a:ext cx="7680960" cy="640080"/>
+              <a:t>规则配置 JSON/YAML 导出</a:t>
+            </a:r>
+            <a:endParaRPr lang="en-US" sz="1100" dirty="0"/>
+          </a:p>
+        </p:txBody>
+      </p:sp>
+      <p:sp>
+        <p:nvSpPr>
+          <p:cNvPr id="10" name="Shape 7"/>
+          <p:cNvSpPr/>
+          <p:nvPr/>
+        </p:nvSpPr>
+        <p:spPr>
+          <a:xfrm>
+            <a:off x="4892040" y="1097280"/>
+            <a:ext cx="3886200" cy="3474720"/>
           </a:xfrm>
           <a:prstGeom prst="rect">
             <a:avLst>
-              <a:gd name="adj" fmla="val 11429"/>
+              <a:gd name="adj" fmla="val 2105"/>
             </a:avLst>
           </a:prstGeom>
           <a:solidFill>
@@ -2386,54 +2418,34 @@
       </p:sp>
       <p:sp>
         <p:nvSpPr>
-          <p:cNvPr id="12" name="Shape 10"/>
-          <p:cNvSpPr/>
-          <p:nvPr/>
-        </p:nvSpPr>
-        <p:spPr>
-          <a:xfrm>
-            <a:off x="731520" y="1965960"/>
-            <a:ext cx="91440" cy="640080"/>
-          </a:xfrm>
-          <a:prstGeom prst="rect">
-            <a:avLst/>
-          </a:prstGeom>
-          <a:solidFill>
-            <a:srgbClr val="7C3AED"/>
-          </a:solidFill>
-          <a:ln/>
-        </p:spPr>
-      </p:sp>
-      <p:sp>
-        <p:nvSpPr>
-          <p:cNvPr id="13" name="Shape 11"/>
-          <p:cNvSpPr/>
-          <p:nvPr/>
-        </p:nvSpPr>
-        <p:spPr>
-          <a:xfrm>
-            <a:off x="1097280" y="2057400"/>
-            <a:ext cx="411480" cy="411480"/>
-          </a:xfrm>
-          <a:prstGeom prst="ellipse">
-            <a:avLst/>
-          </a:prstGeom>
-          <a:solidFill>
-            <a:srgbClr val="7C3AED"/>
-          </a:solidFill>
-          <a:ln/>
-        </p:spPr>
-      </p:sp>
-      <p:sp>
-        <p:nvSpPr>
-          <p:cNvPr id="14" name="Text 12"/>
-          <p:cNvSpPr/>
-          <p:nvPr/>
-        </p:nvSpPr>
-        <p:spPr>
-          <a:xfrm>
-            <a:off x="1097280" y="2057400"/>
-            <a:ext cx="411480" cy="411480"/>
+          <p:cNvPr id="11" name="Shape 8"/>
+          <p:cNvSpPr/>
+          <p:nvPr/>
+        </p:nvSpPr>
+        <p:spPr>
+          <a:xfrm>
+            <a:off x="4892040" y="1097280"/>
+            <a:ext cx="3886200" cy="54864"/>
+          </a:xfrm>
+          <a:prstGeom prst="rect">
+            <a:avLst/>
+          </a:prstGeom>
+          <a:solidFill>
+            <a:srgbClr val="EA580C"/>
+          </a:solidFill>
+          <a:ln/>
+        </p:spPr>
+      </p:sp>
+      <p:sp>
+        <p:nvSpPr>
+          <p:cNvPr id="12" name="Text 9"/>
+          <p:cNvSpPr/>
+          <p:nvPr/>
+        </p:nvSpPr>
+        <p:spPr>
+          <a:xfrm>
+            <a:off x="5029200" y="1188720"/>
+            <a:ext cx="3566160" cy="320040"/>
           </a:xfrm>
           <a:prstGeom prst="rect">
             <a:avLst/>
@@ -2445,34 +2457,58 @@
           <a:bodyPr wrap="square" lIns="0" tIns="0" rIns="0" bIns="0" rtlCol="0" anchor="ctr"/>
           <a:lstStyle/>
           <a:p>
-            <a:pPr algn="ctr" indent="0" marL="0">
-              <a:buNone/>
-            </a:pPr>
-            <a:r>
-              <a:rPr lang="en-US" sz="1400" b="1" dirty="0">
-                <a:solidFill>
-                  <a:srgbClr val="FFFFFF"/>
+            <a:pPr indent="0" marL="0">
+              <a:buNone/>
+            </a:pPr>
+            <a:r>
+              <a:rPr lang="en-US" sz="1600" b="1" dirty="0">
+                <a:solidFill>
+                  <a:srgbClr val="EA580C"/>
                 </a:solidFill>
                 <a:latin typeface="Arial" pitchFamily="34" charset="0"/>
                 <a:ea typeface="Arial" pitchFamily="34" charset="-122"/>
                 <a:cs typeface="Arial" pitchFamily="34" charset="-120"/>
               </a:rPr>
-              <a:t>2</a:t>
-            </a:r>
-            <a:endParaRPr lang="en-US" sz="1400" dirty="0"/>
-          </a:p>
-        </p:txBody>
-      </p:sp>
-      <p:sp>
-        <p:nvSpPr>
-          <p:cNvPr id="15" name="Text 13"/>
-          <p:cNvSpPr/>
-          <p:nvPr/>
-        </p:nvSpPr>
-        <p:spPr>
-          <a:xfrm>
-            <a:off x="1691640" y="1965960"/>
-            <a:ext cx="1097280" cy="640080"/>
+              <a:t>DDL 解析分析</a:t>
+            </a:r>
+            <a:endParaRPr lang="en-US" sz="1600" dirty="0"/>
+          </a:p>
+        </p:txBody>
+      </p:sp>
+      <p:pic>
+        <p:nvPicPr>
+          <p:cNvPr id="13" name="Image 1" descr="preencoded.png">    </p:cNvPr>
+          <p:cNvPicPr>
+            <a:picLocks noChangeAspect="1"/>
+          </p:cNvPicPr>
+          <p:nvPr/>
+        </p:nvPicPr>
+        <p:blipFill>
+          <a:blip r:embed="rId2"/>
+          <a:stretch>
+            <a:fillRect/>
+          </a:stretch>
+        </p:blipFill>
+        <p:spPr>
+          <a:xfrm>
+            <a:off x="5029200" y="1600200"/>
+            <a:ext cx="3566160" cy="2103120"/>
+          </a:xfrm>
+          <a:prstGeom prst="ellipse">
+            <a:avLst/>
+          </a:prstGeom>
+        </p:spPr>
+      </p:pic>
+      <p:sp>
+        <p:nvSpPr>
+          <p:cNvPr id="14" name="Text 10"/>
+          <p:cNvSpPr/>
+          <p:nvPr/>
+        </p:nvSpPr>
+        <p:spPr>
+          <a:xfrm>
+            <a:off x="5029200" y="3794760"/>
+            <a:ext cx="3566160" cy="548640"/>
           </a:xfrm>
           <a:prstGeom prst="rect">
             <a:avLst/>
@@ -2488,46 +2524,24 @@
               <a:buNone/>
             </a:pPr>
             <a:r>
-              <a:rPr lang="en-US" sz="1400" b="1" dirty="0">
-                <a:solidFill>
-                  <a:srgbClr val="7C3AED"/>
+              <a:rPr lang="en-US" sz="1100" dirty="0">
+                <a:solidFill>
+                  <a:srgbClr val="CBD5E1"/>
                 </a:solidFill>
                 <a:latin typeface="Arial" pitchFamily="34" charset="0"/>
                 <a:ea typeface="Arial" pitchFamily="34" charset="-122"/>
                 <a:cs typeface="Arial" pitchFamily="34" charset="-120"/>
               </a:rPr>
-              <a:t>后端层</a:t>
-            </a:r>
-            <a:endParaRPr lang="en-US" sz="1400" dirty="0"/>
-          </a:p>
-        </p:txBody>
-      </p:sp>
-      <p:sp>
-        <p:nvSpPr>
-          <p:cNvPr id="16" name="Text 14"/>
-          <p:cNvSpPr/>
-          <p:nvPr/>
-        </p:nvSpPr>
-        <p:spPr>
-          <a:xfrm>
-            <a:off x="2834640" y="1965960"/>
-            <a:ext cx="5303520" cy="640080"/>
-          </a:xfrm>
-          <a:prstGeom prst="rect">
-            <a:avLst/>
-          </a:prstGeom>
-          <a:noFill/>
-          <a:ln/>
-        </p:spPr>
-        <p:txBody>
-          <a:bodyPr wrap="square" lIns="0" tIns="0" rIns="0" bIns="0" rtlCol="0" anchor="ctr"/>
-          <a:lstStyle/>
-          <a:p>
-            <a:pPr indent="0" marL="0">
-              <a:buNone/>
-            </a:pPr>
-            <a:r>
-              <a:rPr lang="en-US" sz="1200" dirty="0">
+              <a:t>解析 SQL DDL 提取表结构</a:t>
+            </a:r>
+            <a:endParaRPr lang="en-US" sz="1100" dirty="0"/>
+          </a:p>
+          <a:p>
+            <a:pPr indent="0" marL="0">
+              <a:buNone/>
+            </a:pPr>
+            <a:r>
+              <a:rPr lang="en-US" sz="1100" dirty="0">
                 <a:solidFill>
                   <a:srgbClr val="CBD5E1"/>
                 </a:solidFill>
@@ -2535,496 +2549,7 @@
                 <a:ea typeface="Arial" pitchFamily="34" charset="-122"/>
                 <a:cs typeface="Arial" pitchFamily="34" charset="-120"/>
               </a:rPr>
-              <a:t>Express 4 + Agent SDK + SSE 流式推送 + SQLite</a:t>
-            </a:r>
-            <a:endParaRPr lang="en-US" sz="1200" dirty="0"/>
-          </a:p>
-        </p:txBody>
-      </p:sp>
-      <p:sp>
-        <p:nvSpPr>
-          <p:cNvPr id="17" name="Shape 15"/>
-          <p:cNvSpPr/>
-          <p:nvPr/>
-        </p:nvSpPr>
-        <p:spPr>
-          <a:xfrm>
-            <a:off x="731520" y="2743200"/>
-            <a:ext cx="7680960" cy="640080"/>
-          </a:xfrm>
-          <a:prstGeom prst="rect">
-            <a:avLst>
-              <a:gd name="adj" fmla="val 11429"/>
-            </a:avLst>
-          </a:prstGeom>
-          <a:solidFill>
-            <a:srgbClr val="111827"/>
-          </a:solidFill>
-          <a:ln/>
-          <a:effectLst>
-            <a:outerShdw sx="100000" sy="100000" kx="0" ky="0" algn="bl" rotWithShape="0" blurRad="76200" dist="25400" dir="8100000">
-              <a:srgbClr val="000000">
-                <a:alpha val="25000"/>
-              </a:srgbClr>
-            </a:outerShdw>
-          </a:effectLst>
-        </p:spPr>
-      </p:sp>
-      <p:sp>
-        <p:nvSpPr>
-          <p:cNvPr id="18" name="Shape 16"/>
-          <p:cNvSpPr/>
-          <p:nvPr/>
-        </p:nvSpPr>
-        <p:spPr>
-          <a:xfrm>
-            <a:off x="731520" y="2743200"/>
-            <a:ext cx="91440" cy="640080"/>
-          </a:xfrm>
-          <a:prstGeom prst="rect">
-            <a:avLst/>
-          </a:prstGeom>
-          <a:solidFill>
-            <a:srgbClr val="EA580C"/>
-          </a:solidFill>
-          <a:ln/>
-        </p:spPr>
-      </p:sp>
-      <p:sp>
-        <p:nvSpPr>
-          <p:cNvPr id="19" name="Shape 17"/>
-          <p:cNvSpPr/>
-          <p:nvPr/>
-        </p:nvSpPr>
-        <p:spPr>
-          <a:xfrm>
-            <a:off x="1097280" y="2834640"/>
-            <a:ext cx="411480" cy="411480"/>
-          </a:xfrm>
-          <a:prstGeom prst="ellipse">
-            <a:avLst/>
-          </a:prstGeom>
-          <a:solidFill>
-            <a:srgbClr val="EA580C"/>
-          </a:solidFill>
-          <a:ln/>
-        </p:spPr>
-      </p:sp>
-      <p:sp>
-        <p:nvSpPr>
-          <p:cNvPr id="20" name="Text 18"/>
-          <p:cNvSpPr/>
-          <p:nvPr/>
-        </p:nvSpPr>
-        <p:spPr>
-          <a:xfrm>
-            <a:off x="1097280" y="2834640"/>
-            <a:ext cx="411480" cy="411480"/>
-          </a:xfrm>
-          <a:prstGeom prst="rect">
-            <a:avLst/>
-          </a:prstGeom>
-          <a:noFill/>
-          <a:ln/>
-        </p:spPr>
-        <p:txBody>
-          <a:bodyPr wrap="square" lIns="0" tIns="0" rIns="0" bIns="0" rtlCol="0" anchor="ctr"/>
-          <a:lstStyle/>
-          <a:p>
-            <a:pPr algn="ctr" indent="0" marL="0">
-              <a:buNone/>
-            </a:pPr>
-            <a:r>
-              <a:rPr lang="en-US" sz="1400" b="1" dirty="0">
-                <a:solidFill>
-                  <a:srgbClr val="FFFFFF"/>
-                </a:solidFill>
-                <a:latin typeface="Arial" pitchFamily="34" charset="0"/>
-                <a:ea typeface="Arial" pitchFamily="34" charset="-122"/>
-                <a:cs typeface="Arial" pitchFamily="34" charset="-120"/>
-              </a:rPr>
-              <a:t>3</a:t>
-            </a:r>
-            <a:endParaRPr lang="en-US" sz="1400" dirty="0"/>
-          </a:p>
-        </p:txBody>
-      </p:sp>
-      <p:sp>
-        <p:nvSpPr>
-          <p:cNvPr id="21" name="Text 19"/>
-          <p:cNvSpPr/>
-          <p:nvPr/>
-        </p:nvSpPr>
-        <p:spPr>
-          <a:xfrm>
-            <a:off x="1691640" y="2743200"/>
-            <a:ext cx="1097280" cy="640080"/>
-          </a:xfrm>
-          <a:prstGeom prst="rect">
-            <a:avLst/>
-          </a:prstGeom>
-          <a:noFill/>
-          <a:ln/>
-        </p:spPr>
-        <p:txBody>
-          <a:bodyPr wrap="square" lIns="0" tIns="0" rIns="0" bIns="0" rtlCol="0" anchor="ctr"/>
-          <a:lstStyle/>
-          <a:p>
-            <a:pPr indent="0" marL="0">
-              <a:buNone/>
-            </a:pPr>
-            <a:r>
-              <a:rPr lang="en-US" sz="1400" b="1" dirty="0">
-                <a:solidFill>
-                  <a:srgbClr val="EA580C"/>
-                </a:solidFill>
-                <a:latin typeface="Arial" pitchFamily="34" charset="0"/>
-                <a:ea typeface="Arial" pitchFamily="34" charset="-122"/>
-                <a:cs typeface="Arial" pitchFamily="34" charset="-120"/>
-              </a:rPr>
-              <a:t>桌面层</a:t>
-            </a:r>
-            <a:endParaRPr lang="en-US" sz="1400" dirty="0"/>
-          </a:p>
-        </p:txBody>
-      </p:sp>
-      <p:sp>
-        <p:nvSpPr>
-          <p:cNvPr id="22" name="Text 20"/>
-          <p:cNvSpPr/>
-          <p:nvPr/>
-        </p:nvSpPr>
-        <p:spPr>
-          <a:xfrm>
-            <a:off x="2834640" y="2743200"/>
-            <a:ext cx="5303520" cy="640080"/>
-          </a:xfrm>
-          <a:prstGeom prst="rect">
-            <a:avLst/>
-          </a:prstGeom>
-          <a:noFill/>
-          <a:ln/>
-        </p:spPr>
-        <p:txBody>
-          <a:bodyPr wrap="square" lIns="0" tIns="0" rIns="0" bIns="0" rtlCol="0" anchor="ctr"/>
-          <a:lstStyle/>
-          <a:p>
-            <a:pPr indent="0" marL="0">
-              <a:buNone/>
-            </a:pPr>
-            <a:r>
-              <a:rPr lang="en-US" sz="1200" dirty="0">
-                <a:solidFill>
-                  <a:srgbClr val="CBD5E1"/>
-                </a:solidFill>
-                <a:latin typeface="Arial" pitchFamily="34" charset="0"/>
-                <a:ea typeface="Arial" pitchFamily="34" charset="-122"/>
-                <a:cs typeface="Arial" pitchFamily="34" charset="-120"/>
-              </a:rPr>
-              <a:t>Electron 33 + contextBridge 安全封装</a:t>
-            </a:r>
-            <a:endParaRPr lang="en-US" sz="1200" dirty="0"/>
-          </a:p>
-        </p:txBody>
-      </p:sp>
-      <p:sp>
-        <p:nvSpPr>
-          <p:cNvPr id="23" name="Shape 21"/>
-          <p:cNvSpPr/>
-          <p:nvPr/>
-        </p:nvSpPr>
-        <p:spPr>
-          <a:xfrm>
-            <a:off x="731520" y="3520440"/>
-            <a:ext cx="7680960" cy="594360"/>
-          </a:xfrm>
-          <a:prstGeom prst="rect">
-            <a:avLst>
-              <a:gd name="adj" fmla="val 12308"/>
-            </a:avLst>
-          </a:prstGeom>
-          <a:solidFill>
-            <a:srgbClr val="111827"/>
-          </a:solidFill>
-          <a:ln/>
-          <a:effectLst>
-            <a:outerShdw sx="100000" sy="100000" kx="0" ky="0" algn="bl" rotWithShape="0" blurRad="76200" dist="25400" dir="8100000">
-              <a:srgbClr val="000000">
-                <a:alpha val="25000"/>
-              </a:srgbClr>
-            </a:outerShdw>
-          </a:effectLst>
-        </p:spPr>
-      </p:sp>
-      <p:sp>
-        <p:nvSpPr>
-          <p:cNvPr id="24" name="Shape 22"/>
-          <p:cNvSpPr/>
-          <p:nvPr/>
-        </p:nvSpPr>
-        <p:spPr>
-          <a:xfrm>
-            <a:off x="731520" y="3520440"/>
-            <a:ext cx="91440" cy="594360"/>
-          </a:xfrm>
-          <a:prstGeom prst="rect">
-            <a:avLst/>
-          </a:prstGeom>
-          <a:solidFill>
-            <a:srgbClr val="0D9488"/>
-          </a:solidFill>
-          <a:ln/>
-        </p:spPr>
-      </p:sp>
-      <p:sp>
-        <p:nvSpPr>
-          <p:cNvPr id="25" name="Text 23"/>
-          <p:cNvSpPr/>
-          <p:nvPr/>
-        </p:nvSpPr>
-        <p:spPr>
-          <a:xfrm>
-            <a:off x="1005840" y="3520440"/>
-            <a:ext cx="914400" cy="594360"/>
-          </a:xfrm>
-          <a:prstGeom prst="rect">
-            <a:avLst/>
-          </a:prstGeom>
-          <a:noFill/>
-          <a:ln/>
-        </p:spPr>
-        <p:txBody>
-          <a:bodyPr wrap="square" lIns="0" tIns="0" rIns="0" bIns="0" rtlCol="0" anchor="ctr"/>
-          <a:lstStyle/>
-          <a:p>
-            <a:pPr indent="0" marL="0">
-              <a:buNone/>
-            </a:pPr>
-            <a:r>
-              <a:rPr lang="en-US" sz="1200" b="1" dirty="0">
-                <a:solidFill>
-                  <a:srgbClr val="0D9488"/>
-                </a:solidFill>
-                <a:latin typeface="Arial" pitchFamily="34" charset="0"/>
-                <a:ea typeface="Arial" pitchFamily="34" charset="-122"/>
-                <a:cs typeface="Arial" pitchFamily="34" charset="-120"/>
-              </a:rPr>
-              <a:t>数据流</a:t>
-            </a:r>
-            <a:endParaRPr lang="en-US" sz="1200" dirty="0"/>
-          </a:p>
-        </p:txBody>
-      </p:sp>
-      <p:sp>
-        <p:nvSpPr>
-          <p:cNvPr id="26" name="Text 24"/>
-          <p:cNvSpPr/>
-          <p:nvPr/>
-        </p:nvSpPr>
-        <p:spPr>
-          <a:xfrm>
-            <a:off x="2011680" y="3520440"/>
-            <a:ext cx="6217920" cy="594360"/>
-          </a:xfrm>
-          <a:prstGeom prst="rect">
-            <a:avLst/>
-          </a:prstGeom>
-          <a:noFill/>
-          <a:ln/>
-        </p:spPr>
-        <p:txBody>
-          <a:bodyPr wrap="square" lIns="0" tIns="0" rIns="0" bIns="0" rtlCol="0" anchor="ctr"/>
-          <a:lstStyle/>
-          <a:p>
-            <a:pPr indent="0" marL="0">
-              <a:buNone/>
-            </a:pPr>
-            <a:r>
-              <a:rPr lang="en-US" sz="1200" dirty="0">
-                <a:solidFill>
-                  <a:srgbClr val="FFFFFF"/>
-                </a:solidFill>
-                <a:latin typeface="Arial" pitchFamily="34" charset="0"/>
-                <a:ea typeface="Arial" pitchFamily="34" charset="-122"/>
-                <a:cs typeface="Arial" pitchFamily="34" charset="-120"/>
-              </a:rPr>
-              <a:t>用户输入 → Express → Agent SDK query() → SSE 推送 → 实时渲染</a:t>
-            </a:r>
-            <a:endParaRPr lang="en-US" sz="1200" dirty="0"/>
-          </a:p>
-        </p:txBody>
-      </p:sp>
-      <p:sp>
-        <p:nvSpPr>
-          <p:cNvPr id="27" name="Shape 25"/>
-          <p:cNvSpPr/>
-          <p:nvPr/>
-        </p:nvSpPr>
-        <p:spPr>
-          <a:xfrm>
-            <a:off x="731520" y="4297680"/>
-            <a:ext cx="3657600" cy="502920"/>
-          </a:xfrm>
-          <a:prstGeom prst="rect">
-            <a:avLst>
-              <a:gd name="adj" fmla="val 14545"/>
-            </a:avLst>
-          </a:prstGeom>
-          <a:solidFill>
-            <a:srgbClr val="111827"/>
-          </a:solidFill>
-          <a:ln/>
-          <a:effectLst>
-            <a:outerShdw sx="100000" sy="100000" kx="0" ky="0" algn="bl" rotWithShape="0" blurRad="76200" dist="25400" dir="8100000">
-              <a:srgbClr val="000000">
-                <a:alpha val="25000"/>
-              </a:srgbClr>
-            </a:outerShdw>
-          </a:effectLst>
-        </p:spPr>
-      </p:sp>
-      <p:sp>
-        <p:nvSpPr>
-          <p:cNvPr id="28" name="Shape 26"/>
-          <p:cNvSpPr/>
-          <p:nvPr/>
-        </p:nvSpPr>
-        <p:spPr>
-          <a:xfrm>
-            <a:off x="731520" y="4297680"/>
-            <a:ext cx="91440" cy="502920"/>
-          </a:xfrm>
-          <a:prstGeom prst="rect">
-            <a:avLst/>
-          </a:prstGeom>
-          <a:solidFill>
-            <a:srgbClr val="EA580C"/>
-          </a:solidFill>
-          <a:ln/>
-        </p:spPr>
-      </p:sp>
-      <p:sp>
-        <p:nvSpPr>
-          <p:cNvPr id="29" name="Text 27"/>
-          <p:cNvSpPr/>
-          <p:nvPr/>
-        </p:nvSpPr>
-        <p:spPr>
-          <a:xfrm>
-            <a:off x="1005840" y="4297680"/>
-            <a:ext cx="3200400" cy="502920"/>
-          </a:xfrm>
-          <a:prstGeom prst="rect">
-            <a:avLst/>
-          </a:prstGeom>
-          <a:noFill/>
-          <a:ln/>
-        </p:spPr>
-        <p:txBody>
-          <a:bodyPr wrap="square" lIns="0" tIns="0" rIns="0" bIns="0" rtlCol="0" anchor="ctr"/>
-          <a:lstStyle/>
-          <a:p>
-            <a:pPr indent="0" marL="0">
-              <a:buNone/>
-            </a:pPr>
-            <a:r>
-              <a:rPr lang="en-US" sz="1100" dirty="0">
-                <a:solidFill>
-                  <a:srgbClr val="CBD5E1"/>
-                </a:solidFill>
-                <a:latin typeface="Arial" pitchFamily="34" charset="0"/>
-                <a:ea typeface="Arial" pitchFamily="34" charset="-122"/>
-                <a:cs typeface="Arial" pitchFamily="34" charset="-120"/>
-              </a:rPr>
-              <a:t>pnpm dev (浏览器) | pnpm dev:electron (桌面端)</a:t>
-            </a:r>
-            <a:endParaRPr lang="en-US" sz="1100" dirty="0"/>
-          </a:p>
-        </p:txBody>
-      </p:sp>
-      <p:sp>
-        <p:nvSpPr>
-          <p:cNvPr id="30" name="Shape 28"/>
-          <p:cNvSpPr/>
-          <p:nvPr/>
-        </p:nvSpPr>
-        <p:spPr>
-          <a:xfrm>
-            <a:off x="4663440" y="4297680"/>
-            <a:ext cx="3749040" cy="502920"/>
-          </a:xfrm>
-          <a:prstGeom prst="rect">
-            <a:avLst>
-              <a:gd name="adj" fmla="val 14545"/>
-            </a:avLst>
-          </a:prstGeom>
-          <a:solidFill>
-            <a:srgbClr val="111827"/>
-          </a:solidFill>
-          <a:ln/>
-          <a:effectLst>
-            <a:outerShdw sx="100000" sy="100000" kx="0" ky="0" algn="bl" rotWithShape="0" blurRad="76200" dist="25400" dir="8100000">
-              <a:srgbClr val="000000">
-                <a:alpha val="25000"/>
-              </a:srgbClr>
-            </a:outerShdw>
-          </a:effectLst>
-        </p:spPr>
-      </p:sp>
-      <p:sp>
-        <p:nvSpPr>
-          <p:cNvPr id="31" name="Shape 29"/>
-          <p:cNvSpPr/>
-          <p:nvPr/>
-        </p:nvSpPr>
-        <p:spPr>
-          <a:xfrm>
-            <a:off x="4663440" y="4297680"/>
-            <a:ext cx="91440" cy="502920"/>
-          </a:xfrm>
-          <a:prstGeom prst="rect">
-            <a:avLst/>
-          </a:prstGeom>
-          <a:solidFill>
-            <a:srgbClr val="7C3AED"/>
-          </a:solidFill>
-          <a:ln/>
-        </p:spPr>
-      </p:sp>
-      <p:sp>
-        <p:nvSpPr>
-          <p:cNvPr id="32" name="Text 30"/>
-          <p:cNvSpPr/>
-          <p:nvPr/>
-        </p:nvSpPr>
-        <p:spPr>
-          <a:xfrm>
-            <a:off x="4937760" y="4297680"/>
-            <a:ext cx="3291840" cy="502920"/>
-          </a:xfrm>
-          <a:prstGeom prst="rect">
-            <a:avLst/>
-          </a:prstGeom>
-          <a:noFill/>
-          <a:ln/>
-        </p:spPr>
-        <p:txBody>
-          <a:bodyPr wrap="square" lIns="0" tIns="0" rIns="0" bIns="0" rtlCol="0" anchor="ctr"/>
-          <a:lstStyle/>
-          <a:p>
-            <a:pPr indent="0" marL="0">
-              <a:buNone/>
-            </a:pPr>
-            <a:r>
-              <a:rPr lang="en-US" sz="1100" dirty="0">
-                <a:solidFill>
-                  <a:srgbClr val="CBD5E1"/>
-                </a:solidFill>
-                <a:latin typeface="Arial" pitchFamily="34" charset="0"/>
-                <a:ea typeface="Arial" pitchFamily="34" charset="-122"/>
-                <a:cs typeface="Arial" pitchFamily="34" charset="-120"/>
-              </a:rPr>
-              <a:t>CodeBuddy Agent SDK v0.3.43+</a:t>
+              <a:t>字段/索引/约束格式化展示</a:t>
             </a:r>
             <a:endParaRPr lang="en-US" sz="1100" dirty="0"/>
           </a:p>
@@ -3077,6 +2602,981 @@
             <a:avLst/>
           </a:prstGeom>
           <a:solidFill>
+            <a:srgbClr val="EA580C"/>
+          </a:solidFill>
+          <a:ln/>
+        </p:spPr>
+      </p:sp>
+      <p:sp>
+        <p:nvSpPr>
+          <p:cNvPr id="3" name="Text 1"/>
+          <p:cNvSpPr/>
+          <p:nvPr/>
+        </p:nvSpPr>
+        <p:spPr>
+          <a:xfrm>
+            <a:off x="731520" y="274320"/>
+            <a:ext cx="7680960" cy="640080"/>
+          </a:xfrm>
+          <a:prstGeom prst="rect">
+            <a:avLst/>
+          </a:prstGeom>
+          <a:noFill/>
+          <a:ln/>
+        </p:spPr>
+        <p:txBody>
+          <a:bodyPr wrap="square" lIns="0" tIns="0" rIns="0" bIns="0" rtlCol="0" anchor="ctr"/>
+          <a:lstStyle/>
+          <a:p>
+            <a:pPr indent="0" marL="0">
+              <a:buNone/>
+            </a:pPr>
+            <a:r>
+              <a:rPr lang="en-US" sz="2800" b="1" dirty="0">
+                <a:solidFill>
+                  <a:srgbClr val="FFFFFF"/>
+                </a:solidFill>
+                <a:latin typeface="Arial Black" pitchFamily="34" charset="0"/>
+                <a:ea typeface="Arial Black" pitchFamily="34" charset="-122"/>
+                <a:cs typeface="Arial Black" pitchFamily="34" charset="-120"/>
+              </a:rPr>
+              <a:t>技术架构</a:t>
+            </a:r>
+            <a:endParaRPr lang="en-US" sz="2800" dirty="0"/>
+          </a:p>
+        </p:txBody>
+      </p:sp>
+      <p:sp>
+        <p:nvSpPr>
+          <p:cNvPr id="4" name="Shape 2"/>
+          <p:cNvSpPr/>
+          <p:nvPr/>
+        </p:nvSpPr>
+        <p:spPr>
+          <a:xfrm>
+            <a:off x="731520" y="914400"/>
+            <a:ext cx="0" cy="0"/>
+          </a:xfrm>
+          <a:prstGeom prst="line">
+            <a:avLst/>
+          </a:prstGeom>
+          <a:noFill/>
+          <a:ln w="38100">
+            <a:solidFill>
+              <a:srgbClr val="0D9488"/>
+            </a:solidFill>
+            <a:prstDash val="solid"/>
+          </a:ln>
+        </p:spPr>
+      </p:sp>
+      <p:sp>
+        <p:nvSpPr>
+          <p:cNvPr id="5" name="Shape 3"/>
+          <p:cNvSpPr/>
+          <p:nvPr/>
+        </p:nvSpPr>
+        <p:spPr>
+          <a:xfrm>
+            <a:off x="731520" y="1188720"/>
+            <a:ext cx="7680960" cy="640080"/>
+          </a:xfrm>
+          <a:prstGeom prst="rect">
+            <a:avLst>
+              <a:gd name="adj" fmla="val 11429"/>
+            </a:avLst>
+          </a:prstGeom>
+          <a:solidFill>
+            <a:srgbClr val="111827"/>
+          </a:solidFill>
+          <a:ln/>
+          <a:effectLst>
+            <a:outerShdw sx="100000" sy="100000" kx="0" ky="0" algn="bl" rotWithShape="0" blurRad="76200" dist="25400" dir="8100000">
+              <a:srgbClr val="000000">
+                <a:alpha val="25000"/>
+              </a:srgbClr>
+            </a:outerShdw>
+          </a:effectLst>
+        </p:spPr>
+      </p:sp>
+      <p:sp>
+        <p:nvSpPr>
+          <p:cNvPr id="6" name="Shape 4"/>
+          <p:cNvSpPr/>
+          <p:nvPr/>
+        </p:nvSpPr>
+        <p:spPr>
+          <a:xfrm>
+            <a:off x="731520" y="1188720"/>
+            <a:ext cx="91440" cy="640080"/>
+          </a:xfrm>
+          <a:prstGeom prst="rect">
+            <a:avLst/>
+          </a:prstGeom>
+          <a:solidFill>
+            <a:srgbClr val="0D9488"/>
+          </a:solidFill>
+          <a:ln/>
+        </p:spPr>
+      </p:sp>
+      <p:sp>
+        <p:nvSpPr>
+          <p:cNvPr id="7" name="Shape 5"/>
+          <p:cNvSpPr/>
+          <p:nvPr/>
+        </p:nvSpPr>
+        <p:spPr>
+          <a:xfrm>
+            <a:off x="1097280" y="1280160"/>
+            <a:ext cx="411480" cy="411480"/>
+          </a:xfrm>
+          <a:prstGeom prst="ellipse">
+            <a:avLst/>
+          </a:prstGeom>
+          <a:solidFill>
+            <a:srgbClr val="0D9488"/>
+          </a:solidFill>
+          <a:ln/>
+        </p:spPr>
+      </p:sp>
+      <p:sp>
+        <p:nvSpPr>
+          <p:cNvPr id="8" name="Text 6"/>
+          <p:cNvSpPr/>
+          <p:nvPr/>
+        </p:nvSpPr>
+        <p:spPr>
+          <a:xfrm>
+            <a:off x="1097280" y="1280160"/>
+            <a:ext cx="411480" cy="411480"/>
+          </a:xfrm>
+          <a:prstGeom prst="rect">
+            <a:avLst/>
+          </a:prstGeom>
+          <a:noFill/>
+          <a:ln/>
+        </p:spPr>
+        <p:txBody>
+          <a:bodyPr wrap="square" lIns="0" tIns="0" rIns="0" bIns="0" rtlCol="0" anchor="ctr"/>
+          <a:lstStyle/>
+          <a:p>
+            <a:pPr algn="ctr" indent="0" marL="0">
+              <a:buNone/>
+            </a:pPr>
+            <a:r>
+              <a:rPr lang="en-US" sz="1400" b="1" dirty="0">
+                <a:solidFill>
+                  <a:srgbClr val="FFFFFF"/>
+                </a:solidFill>
+                <a:latin typeface="Arial" pitchFamily="34" charset="0"/>
+                <a:ea typeface="Arial" pitchFamily="34" charset="-122"/>
+                <a:cs typeface="Arial" pitchFamily="34" charset="-120"/>
+              </a:rPr>
+              <a:t>1</a:t>
+            </a:r>
+            <a:endParaRPr lang="en-US" sz="1400" dirty="0"/>
+          </a:p>
+        </p:txBody>
+      </p:sp>
+      <p:sp>
+        <p:nvSpPr>
+          <p:cNvPr id="9" name="Text 7"/>
+          <p:cNvSpPr/>
+          <p:nvPr/>
+        </p:nvSpPr>
+        <p:spPr>
+          <a:xfrm>
+            <a:off x="1691640" y="1188720"/>
+            <a:ext cx="1097280" cy="640080"/>
+          </a:xfrm>
+          <a:prstGeom prst="rect">
+            <a:avLst/>
+          </a:prstGeom>
+          <a:noFill/>
+          <a:ln/>
+        </p:spPr>
+        <p:txBody>
+          <a:bodyPr wrap="square" lIns="0" tIns="0" rIns="0" bIns="0" rtlCol="0" anchor="ctr"/>
+          <a:lstStyle/>
+          <a:p>
+            <a:pPr indent="0" marL="0">
+              <a:buNone/>
+            </a:pPr>
+            <a:r>
+              <a:rPr lang="en-US" sz="1400" b="1" dirty="0">
+                <a:solidFill>
+                  <a:srgbClr val="0D9488"/>
+                </a:solidFill>
+                <a:latin typeface="Arial" pitchFamily="34" charset="0"/>
+                <a:ea typeface="Arial" pitchFamily="34" charset="-122"/>
+                <a:cs typeface="Arial" pitchFamily="34" charset="-120"/>
+              </a:rPr>
+              <a:t>前端层</a:t>
+            </a:r>
+            <a:endParaRPr lang="en-US" sz="1400" dirty="0"/>
+          </a:p>
+        </p:txBody>
+      </p:sp>
+      <p:sp>
+        <p:nvSpPr>
+          <p:cNvPr id="10" name="Text 8"/>
+          <p:cNvSpPr/>
+          <p:nvPr/>
+        </p:nvSpPr>
+        <p:spPr>
+          <a:xfrm>
+            <a:off x="2834640" y="1188720"/>
+            <a:ext cx="5303520" cy="640080"/>
+          </a:xfrm>
+          <a:prstGeom prst="rect">
+            <a:avLst/>
+          </a:prstGeom>
+          <a:noFill/>
+          <a:ln/>
+        </p:spPr>
+        <p:txBody>
+          <a:bodyPr wrap="square" lIns="0" tIns="0" rIns="0" bIns="0" rtlCol="0" anchor="ctr"/>
+          <a:lstStyle/>
+          <a:p>
+            <a:pPr indent="0" marL="0">
+              <a:buNone/>
+            </a:pPr>
+            <a:r>
+              <a:rPr lang="en-US" sz="1200" dirty="0">
+                <a:solidFill>
+                  <a:srgbClr val="CBD5E1"/>
+                </a:solidFill>
+                <a:latin typeface="Arial" pitchFamily="34" charset="0"/>
+                <a:ea typeface="Arial" pitchFamily="34" charset="-122"/>
+                <a:cs typeface="Arial" pitchFamily="34" charset="-120"/>
+              </a:rPr>
+              <a:t>React 18 + TypeScript + Vite 5 + TDesign + Tailwind</a:t>
+            </a:r>
+            <a:endParaRPr lang="en-US" sz="1200" dirty="0"/>
+          </a:p>
+        </p:txBody>
+      </p:sp>
+      <p:sp>
+        <p:nvSpPr>
+          <p:cNvPr id="11" name="Shape 9"/>
+          <p:cNvSpPr/>
+          <p:nvPr/>
+        </p:nvSpPr>
+        <p:spPr>
+          <a:xfrm>
+            <a:off x="731520" y="1965960"/>
+            <a:ext cx="7680960" cy="640080"/>
+          </a:xfrm>
+          <a:prstGeom prst="rect">
+            <a:avLst>
+              <a:gd name="adj" fmla="val 11429"/>
+            </a:avLst>
+          </a:prstGeom>
+          <a:solidFill>
+            <a:srgbClr val="111827"/>
+          </a:solidFill>
+          <a:ln/>
+          <a:effectLst>
+            <a:outerShdw sx="100000" sy="100000" kx="0" ky="0" algn="bl" rotWithShape="0" blurRad="76200" dist="25400" dir="8100000">
+              <a:srgbClr val="000000">
+                <a:alpha val="25000"/>
+              </a:srgbClr>
+            </a:outerShdw>
+          </a:effectLst>
+        </p:spPr>
+      </p:sp>
+      <p:sp>
+        <p:nvSpPr>
+          <p:cNvPr id="12" name="Shape 10"/>
+          <p:cNvSpPr/>
+          <p:nvPr/>
+        </p:nvSpPr>
+        <p:spPr>
+          <a:xfrm>
+            <a:off x="731520" y="1965960"/>
+            <a:ext cx="91440" cy="640080"/>
+          </a:xfrm>
+          <a:prstGeom prst="rect">
+            <a:avLst/>
+          </a:prstGeom>
+          <a:solidFill>
+            <a:srgbClr val="7C3AED"/>
+          </a:solidFill>
+          <a:ln/>
+        </p:spPr>
+      </p:sp>
+      <p:sp>
+        <p:nvSpPr>
+          <p:cNvPr id="13" name="Shape 11"/>
+          <p:cNvSpPr/>
+          <p:nvPr/>
+        </p:nvSpPr>
+        <p:spPr>
+          <a:xfrm>
+            <a:off x="1097280" y="2057400"/>
+            <a:ext cx="411480" cy="411480"/>
+          </a:xfrm>
+          <a:prstGeom prst="ellipse">
+            <a:avLst/>
+          </a:prstGeom>
+          <a:solidFill>
+            <a:srgbClr val="7C3AED"/>
+          </a:solidFill>
+          <a:ln/>
+        </p:spPr>
+      </p:sp>
+      <p:sp>
+        <p:nvSpPr>
+          <p:cNvPr id="14" name="Text 12"/>
+          <p:cNvSpPr/>
+          <p:nvPr/>
+        </p:nvSpPr>
+        <p:spPr>
+          <a:xfrm>
+            <a:off x="1097280" y="2057400"/>
+            <a:ext cx="411480" cy="411480"/>
+          </a:xfrm>
+          <a:prstGeom prst="rect">
+            <a:avLst/>
+          </a:prstGeom>
+          <a:noFill/>
+          <a:ln/>
+        </p:spPr>
+        <p:txBody>
+          <a:bodyPr wrap="square" lIns="0" tIns="0" rIns="0" bIns="0" rtlCol="0" anchor="ctr"/>
+          <a:lstStyle/>
+          <a:p>
+            <a:pPr algn="ctr" indent="0" marL="0">
+              <a:buNone/>
+            </a:pPr>
+            <a:r>
+              <a:rPr lang="en-US" sz="1400" b="1" dirty="0">
+                <a:solidFill>
+                  <a:srgbClr val="FFFFFF"/>
+                </a:solidFill>
+                <a:latin typeface="Arial" pitchFamily="34" charset="0"/>
+                <a:ea typeface="Arial" pitchFamily="34" charset="-122"/>
+                <a:cs typeface="Arial" pitchFamily="34" charset="-120"/>
+              </a:rPr>
+              <a:t>2</a:t>
+            </a:r>
+            <a:endParaRPr lang="en-US" sz="1400" dirty="0"/>
+          </a:p>
+        </p:txBody>
+      </p:sp>
+      <p:sp>
+        <p:nvSpPr>
+          <p:cNvPr id="15" name="Text 13"/>
+          <p:cNvSpPr/>
+          <p:nvPr/>
+        </p:nvSpPr>
+        <p:spPr>
+          <a:xfrm>
+            <a:off x="1691640" y="1965960"/>
+            <a:ext cx="1097280" cy="640080"/>
+          </a:xfrm>
+          <a:prstGeom prst="rect">
+            <a:avLst/>
+          </a:prstGeom>
+          <a:noFill/>
+          <a:ln/>
+        </p:spPr>
+        <p:txBody>
+          <a:bodyPr wrap="square" lIns="0" tIns="0" rIns="0" bIns="0" rtlCol="0" anchor="ctr"/>
+          <a:lstStyle/>
+          <a:p>
+            <a:pPr indent="0" marL="0">
+              <a:buNone/>
+            </a:pPr>
+            <a:r>
+              <a:rPr lang="en-US" sz="1400" b="1" dirty="0">
+                <a:solidFill>
+                  <a:srgbClr val="7C3AED"/>
+                </a:solidFill>
+                <a:latin typeface="Arial" pitchFamily="34" charset="0"/>
+                <a:ea typeface="Arial" pitchFamily="34" charset="-122"/>
+                <a:cs typeface="Arial" pitchFamily="34" charset="-120"/>
+              </a:rPr>
+              <a:t>后端层</a:t>
+            </a:r>
+            <a:endParaRPr lang="en-US" sz="1400" dirty="0"/>
+          </a:p>
+        </p:txBody>
+      </p:sp>
+      <p:sp>
+        <p:nvSpPr>
+          <p:cNvPr id="16" name="Text 14"/>
+          <p:cNvSpPr/>
+          <p:nvPr/>
+        </p:nvSpPr>
+        <p:spPr>
+          <a:xfrm>
+            <a:off x="2834640" y="1965960"/>
+            <a:ext cx="5303520" cy="640080"/>
+          </a:xfrm>
+          <a:prstGeom prst="rect">
+            <a:avLst/>
+          </a:prstGeom>
+          <a:noFill/>
+          <a:ln/>
+        </p:spPr>
+        <p:txBody>
+          <a:bodyPr wrap="square" lIns="0" tIns="0" rIns="0" bIns="0" rtlCol="0" anchor="ctr"/>
+          <a:lstStyle/>
+          <a:p>
+            <a:pPr indent="0" marL="0">
+              <a:buNone/>
+            </a:pPr>
+            <a:r>
+              <a:rPr lang="en-US" sz="1200" dirty="0">
+                <a:solidFill>
+                  <a:srgbClr val="CBD5E1"/>
+                </a:solidFill>
+                <a:latin typeface="Arial" pitchFamily="34" charset="0"/>
+                <a:ea typeface="Arial" pitchFamily="34" charset="-122"/>
+                <a:cs typeface="Arial" pitchFamily="34" charset="-120"/>
+              </a:rPr>
+              <a:t>Express 4 + Agent SDK + SSE 流式推送 + SQLite</a:t>
+            </a:r>
+            <a:endParaRPr lang="en-US" sz="1200" dirty="0"/>
+          </a:p>
+        </p:txBody>
+      </p:sp>
+      <p:sp>
+        <p:nvSpPr>
+          <p:cNvPr id="17" name="Shape 15"/>
+          <p:cNvSpPr/>
+          <p:nvPr/>
+        </p:nvSpPr>
+        <p:spPr>
+          <a:xfrm>
+            <a:off x="731520" y="2743200"/>
+            <a:ext cx="7680960" cy="640080"/>
+          </a:xfrm>
+          <a:prstGeom prst="rect">
+            <a:avLst>
+              <a:gd name="adj" fmla="val 11429"/>
+            </a:avLst>
+          </a:prstGeom>
+          <a:solidFill>
+            <a:srgbClr val="111827"/>
+          </a:solidFill>
+          <a:ln/>
+          <a:effectLst>
+            <a:outerShdw sx="100000" sy="100000" kx="0" ky="0" algn="bl" rotWithShape="0" blurRad="76200" dist="25400" dir="8100000">
+              <a:srgbClr val="000000">
+                <a:alpha val="25000"/>
+              </a:srgbClr>
+            </a:outerShdw>
+          </a:effectLst>
+        </p:spPr>
+      </p:sp>
+      <p:sp>
+        <p:nvSpPr>
+          <p:cNvPr id="18" name="Shape 16"/>
+          <p:cNvSpPr/>
+          <p:nvPr/>
+        </p:nvSpPr>
+        <p:spPr>
+          <a:xfrm>
+            <a:off x="731520" y="2743200"/>
+            <a:ext cx="91440" cy="640080"/>
+          </a:xfrm>
+          <a:prstGeom prst="rect">
+            <a:avLst/>
+          </a:prstGeom>
+          <a:solidFill>
+            <a:srgbClr val="EA580C"/>
+          </a:solidFill>
+          <a:ln/>
+        </p:spPr>
+      </p:sp>
+      <p:sp>
+        <p:nvSpPr>
+          <p:cNvPr id="19" name="Shape 17"/>
+          <p:cNvSpPr/>
+          <p:nvPr/>
+        </p:nvSpPr>
+        <p:spPr>
+          <a:xfrm>
+            <a:off x="1097280" y="2834640"/>
+            <a:ext cx="411480" cy="411480"/>
+          </a:xfrm>
+          <a:prstGeom prst="ellipse">
+            <a:avLst/>
+          </a:prstGeom>
+          <a:solidFill>
+            <a:srgbClr val="EA580C"/>
+          </a:solidFill>
+          <a:ln/>
+        </p:spPr>
+      </p:sp>
+      <p:sp>
+        <p:nvSpPr>
+          <p:cNvPr id="20" name="Text 18"/>
+          <p:cNvSpPr/>
+          <p:nvPr/>
+        </p:nvSpPr>
+        <p:spPr>
+          <a:xfrm>
+            <a:off x="1097280" y="2834640"/>
+            <a:ext cx="411480" cy="411480"/>
+          </a:xfrm>
+          <a:prstGeom prst="rect">
+            <a:avLst/>
+          </a:prstGeom>
+          <a:noFill/>
+          <a:ln/>
+        </p:spPr>
+        <p:txBody>
+          <a:bodyPr wrap="square" lIns="0" tIns="0" rIns="0" bIns="0" rtlCol="0" anchor="ctr"/>
+          <a:lstStyle/>
+          <a:p>
+            <a:pPr algn="ctr" indent="0" marL="0">
+              <a:buNone/>
+            </a:pPr>
+            <a:r>
+              <a:rPr lang="en-US" sz="1400" b="1" dirty="0">
+                <a:solidFill>
+                  <a:srgbClr val="FFFFFF"/>
+                </a:solidFill>
+                <a:latin typeface="Arial" pitchFamily="34" charset="0"/>
+                <a:ea typeface="Arial" pitchFamily="34" charset="-122"/>
+                <a:cs typeface="Arial" pitchFamily="34" charset="-120"/>
+              </a:rPr>
+              <a:t>3</a:t>
+            </a:r>
+            <a:endParaRPr lang="en-US" sz="1400" dirty="0"/>
+          </a:p>
+        </p:txBody>
+      </p:sp>
+      <p:sp>
+        <p:nvSpPr>
+          <p:cNvPr id="21" name="Text 19"/>
+          <p:cNvSpPr/>
+          <p:nvPr/>
+        </p:nvSpPr>
+        <p:spPr>
+          <a:xfrm>
+            <a:off x="1691640" y="2743200"/>
+            <a:ext cx="1097280" cy="640080"/>
+          </a:xfrm>
+          <a:prstGeom prst="rect">
+            <a:avLst/>
+          </a:prstGeom>
+          <a:noFill/>
+          <a:ln/>
+        </p:spPr>
+        <p:txBody>
+          <a:bodyPr wrap="square" lIns="0" tIns="0" rIns="0" bIns="0" rtlCol="0" anchor="ctr"/>
+          <a:lstStyle/>
+          <a:p>
+            <a:pPr indent="0" marL="0">
+              <a:buNone/>
+            </a:pPr>
+            <a:r>
+              <a:rPr lang="en-US" sz="1400" b="1" dirty="0">
+                <a:solidFill>
+                  <a:srgbClr val="EA580C"/>
+                </a:solidFill>
+                <a:latin typeface="Arial" pitchFamily="34" charset="0"/>
+                <a:ea typeface="Arial" pitchFamily="34" charset="-122"/>
+                <a:cs typeface="Arial" pitchFamily="34" charset="-120"/>
+              </a:rPr>
+              <a:t>桌面层</a:t>
+            </a:r>
+            <a:endParaRPr lang="en-US" sz="1400" dirty="0"/>
+          </a:p>
+        </p:txBody>
+      </p:sp>
+      <p:sp>
+        <p:nvSpPr>
+          <p:cNvPr id="22" name="Text 20"/>
+          <p:cNvSpPr/>
+          <p:nvPr/>
+        </p:nvSpPr>
+        <p:spPr>
+          <a:xfrm>
+            <a:off x="2834640" y="2743200"/>
+            <a:ext cx="5303520" cy="640080"/>
+          </a:xfrm>
+          <a:prstGeom prst="rect">
+            <a:avLst/>
+          </a:prstGeom>
+          <a:noFill/>
+          <a:ln/>
+        </p:spPr>
+        <p:txBody>
+          <a:bodyPr wrap="square" lIns="0" tIns="0" rIns="0" bIns="0" rtlCol="0" anchor="ctr"/>
+          <a:lstStyle/>
+          <a:p>
+            <a:pPr indent="0" marL="0">
+              <a:buNone/>
+            </a:pPr>
+            <a:r>
+              <a:rPr lang="en-US" sz="1200" dirty="0">
+                <a:solidFill>
+                  <a:srgbClr val="CBD5E1"/>
+                </a:solidFill>
+                <a:latin typeface="Arial" pitchFamily="34" charset="0"/>
+                <a:ea typeface="Arial" pitchFamily="34" charset="-122"/>
+                <a:cs typeface="Arial" pitchFamily="34" charset="-120"/>
+              </a:rPr>
+              <a:t>Electron 33 + contextBridge 安全封装</a:t>
+            </a:r>
+            <a:endParaRPr lang="en-US" sz="1200" dirty="0"/>
+          </a:p>
+        </p:txBody>
+      </p:sp>
+      <p:sp>
+        <p:nvSpPr>
+          <p:cNvPr id="23" name="Shape 21"/>
+          <p:cNvSpPr/>
+          <p:nvPr/>
+        </p:nvSpPr>
+        <p:spPr>
+          <a:xfrm>
+            <a:off x="731520" y="3520440"/>
+            <a:ext cx="7680960" cy="594360"/>
+          </a:xfrm>
+          <a:prstGeom prst="rect">
+            <a:avLst>
+              <a:gd name="adj" fmla="val 12308"/>
+            </a:avLst>
+          </a:prstGeom>
+          <a:solidFill>
+            <a:srgbClr val="111827"/>
+          </a:solidFill>
+          <a:ln/>
+          <a:effectLst>
+            <a:outerShdw sx="100000" sy="100000" kx="0" ky="0" algn="bl" rotWithShape="0" blurRad="76200" dist="25400" dir="8100000">
+              <a:srgbClr val="000000">
+                <a:alpha val="25000"/>
+              </a:srgbClr>
+            </a:outerShdw>
+          </a:effectLst>
+        </p:spPr>
+      </p:sp>
+      <p:sp>
+        <p:nvSpPr>
+          <p:cNvPr id="24" name="Shape 22"/>
+          <p:cNvSpPr/>
+          <p:nvPr/>
+        </p:nvSpPr>
+        <p:spPr>
+          <a:xfrm>
+            <a:off x="731520" y="3520440"/>
+            <a:ext cx="91440" cy="594360"/>
+          </a:xfrm>
+          <a:prstGeom prst="rect">
+            <a:avLst/>
+          </a:prstGeom>
+          <a:solidFill>
+            <a:srgbClr val="0D9488"/>
+          </a:solidFill>
+          <a:ln/>
+        </p:spPr>
+      </p:sp>
+      <p:sp>
+        <p:nvSpPr>
+          <p:cNvPr id="25" name="Text 23"/>
+          <p:cNvSpPr/>
+          <p:nvPr/>
+        </p:nvSpPr>
+        <p:spPr>
+          <a:xfrm>
+            <a:off x="1005840" y="3520440"/>
+            <a:ext cx="914400" cy="594360"/>
+          </a:xfrm>
+          <a:prstGeom prst="rect">
+            <a:avLst/>
+          </a:prstGeom>
+          <a:noFill/>
+          <a:ln/>
+        </p:spPr>
+        <p:txBody>
+          <a:bodyPr wrap="square" lIns="0" tIns="0" rIns="0" bIns="0" rtlCol="0" anchor="ctr"/>
+          <a:lstStyle/>
+          <a:p>
+            <a:pPr indent="0" marL="0">
+              <a:buNone/>
+            </a:pPr>
+            <a:r>
+              <a:rPr lang="en-US" sz="1200" b="1" dirty="0">
+                <a:solidFill>
+                  <a:srgbClr val="0D9488"/>
+                </a:solidFill>
+                <a:latin typeface="Arial" pitchFamily="34" charset="0"/>
+                <a:ea typeface="Arial" pitchFamily="34" charset="-122"/>
+                <a:cs typeface="Arial" pitchFamily="34" charset="-120"/>
+              </a:rPr>
+              <a:t>数据流</a:t>
+            </a:r>
+            <a:endParaRPr lang="en-US" sz="1200" dirty="0"/>
+          </a:p>
+        </p:txBody>
+      </p:sp>
+      <p:sp>
+        <p:nvSpPr>
+          <p:cNvPr id="26" name="Text 24"/>
+          <p:cNvSpPr/>
+          <p:nvPr/>
+        </p:nvSpPr>
+        <p:spPr>
+          <a:xfrm>
+            <a:off x="2011680" y="3520440"/>
+            <a:ext cx="6217920" cy="594360"/>
+          </a:xfrm>
+          <a:prstGeom prst="rect">
+            <a:avLst/>
+          </a:prstGeom>
+          <a:noFill/>
+          <a:ln/>
+        </p:spPr>
+        <p:txBody>
+          <a:bodyPr wrap="square" lIns="0" tIns="0" rIns="0" bIns="0" rtlCol="0" anchor="ctr"/>
+          <a:lstStyle/>
+          <a:p>
+            <a:pPr indent="0" marL="0">
+              <a:buNone/>
+            </a:pPr>
+            <a:r>
+              <a:rPr lang="en-US" sz="1200" dirty="0">
+                <a:solidFill>
+                  <a:srgbClr val="FFFFFF"/>
+                </a:solidFill>
+                <a:latin typeface="Arial" pitchFamily="34" charset="0"/>
+                <a:ea typeface="Arial" pitchFamily="34" charset="-122"/>
+                <a:cs typeface="Arial" pitchFamily="34" charset="-120"/>
+              </a:rPr>
+              <a:t>用户输入 → Express → Agent SDK query() → SSE 推送 → 实时渲染</a:t>
+            </a:r>
+            <a:endParaRPr lang="en-US" sz="1200" dirty="0"/>
+          </a:p>
+        </p:txBody>
+      </p:sp>
+      <p:sp>
+        <p:nvSpPr>
+          <p:cNvPr id="27" name="Shape 25"/>
+          <p:cNvSpPr/>
+          <p:nvPr/>
+        </p:nvSpPr>
+        <p:spPr>
+          <a:xfrm>
+            <a:off x="731520" y="4297680"/>
+            <a:ext cx="3657600" cy="502920"/>
+          </a:xfrm>
+          <a:prstGeom prst="rect">
+            <a:avLst>
+              <a:gd name="adj" fmla="val 14545"/>
+            </a:avLst>
+          </a:prstGeom>
+          <a:solidFill>
+            <a:srgbClr val="111827"/>
+          </a:solidFill>
+          <a:ln/>
+          <a:effectLst>
+            <a:outerShdw sx="100000" sy="100000" kx="0" ky="0" algn="bl" rotWithShape="0" blurRad="76200" dist="25400" dir="8100000">
+              <a:srgbClr val="000000">
+                <a:alpha val="25000"/>
+              </a:srgbClr>
+            </a:outerShdw>
+          </a:effectLst>
+        </p:spPr>
+      </p:sp>
+      <p:sp>
+        <p:nvSpPr>
+          <p:cNvPr id="28" name="Shape 26"/>
+          <p:cNvSpPr/>
+          <p:nvPr/>
+        </p:nvSpPr>
+        <p:spPr>
+          <a:xfrm>
+            <a:off x="731520" y="4297680"/>
+            <a:ext cx="91440" cy="502920"/>
+          </a:xfrm>
+          <a:prstGeom prst="rect">
+            <a:avLst/>
+          </a:prstGeom>
+          <a:solidFill>
+            <a:srgbClr val="EA580C"/>
+          </a:solidFill>
+          <a:ln/>
+        </p:spPr>
+      </p:sp>
+      <p:sp>
+        <p:nvSpPr>
+          <p:cNvPr id="29" name="Text 27"/>
+          <p:cNvSpPr/>
+          <p:nvPr/>
+        </p:nvSpPr>
+        <p:spPr>
+          <a:xfrm>
+            <a:off x="1005840" y="4297680"/>
+            <a:ext cx="3200400" cy="502920"/>
+          </a:xfrm>
+          <a:prstGeom prst="rect">
+            <a:avLst/>
+          </a:prstGeom>
+          <a:noFill/>
+          <a:ln/>
+        </p:spPr>
+        <p:txBody>
+          <a:bodyPr wrap="square" lIns="0" tIns="0" rIns="0" bIns="0" rtlCol="0" anchor="ctr"/>
+          <a:lstStyle/>
+          <a:p>
+            <a:pPr indent="0" marL="0">
+              <a:buNone/>
+            </a:pPr>
+            <a:r>
+              <a:rPr lang="en-US" sz="1100" dirty="0">
+                <a:solidFill>
+                  <a:srgbClr val="CBD5E1"/>
+                </a:solidFill>
+                <a:latin typeface="Arial" pitchFamily="34" charset="0"/>
+                <a:ea typeface="Arial" pitchFamily="34" charset="-122"/>
+                <a:cs typeface="Arial" pitchFamily="34" charset="-120"/>
+              </a:rPr>
+              <a:t>pnpm dev (浏览器) | pnpm dev:electron (桌面端)</a:t>
+            </a:r>
+            <a:endParaRPr lang="en-US" sz="1100" dirty="0"/>
+          </a:p>
+        </p:txBody>
+      </p:sp>
+      <p:sp>
+        <p:nvSpPr>
+          <p:cNvPr id="30" name="Shape 28"/>
+          <p:cNvSpPr/>
+          <p:nvPr/>
+        </p:nvSpPr>
+        <p:spPr>
+          <a:xfrm>
+            <a:off x="4663440" y="4297680"/>
+            <a:ext cx="3749040" cy="502920"/>
+          </a:xfrm>
+          <a:prstGeom prst="rect">
+            <a:avLst>
+              <a:gd name="adj" fmla="val 14545"/>
+            </a:avLst>
+          </a:prstGeom>
+          <a:solidFill>
+            <a:srgbClr val="111827"/>
+          </a:solidFill>
+          <a:ln/>
+          <a:effectLst>
+            <a:outerShdw sx="100000" sy="100000" kx="0" ky="0" algn="bl" rotWithShape="0" blurRad="76200" dist="25400" dir="8100000">
+              <a:srgbClr val="000000">
+                <a:alpha val="25000"/>
+              </a:srgbClr>
+            </a:outerShdw>
+          </a:effectLst>
+        </p:spPr>
+      </p:sp>
+      <p:sp>
+        <p:nvSpPr>
+          <p:cNvPr id="31" name="Shape 29"/>
+          <p:cNvSpPr/>
+          <p:nvPr/>
+        </p:nvSpPr>
+        <p:spPr>
+          <a:xfrm>
+            <a:off x="4663440" y="4297680"/>
+            <a:ext cx="91440" cy="502920"/>
+          </a:xfrm>
+          <a:prstGeom prst="rect">
+            <a:avLst/>
+          </a:prstGeom>
+          <a:solidFill>
+            <a:srgbClr val="7C3AED"/>
+          </a:solidFill>
+          <a:ln/>
+        </p:spPr>
+      </p:sp>
+      <p:sp>
+        <p:nvSpPr>
+          <p:cNvPr id="32" name="Text 30"/>
+          <p:cNvSpPr/>
+          <p:nvPr/>
+        </p:nvSpPr>
+        <p:spPr>
+          <a:xfrm>
+            <a:off x="4937760" y="4297680"/>
+            <a:ext cx="3291840" cy="502920"/>
+          </a:xfrm>
+          <a:prstGeom prst="rect">
+            <a:avLst/>
+          </a:prstGeom>
+          <a:noFill/>
+          <a:ln/>
+        </p:spPr>
+        <p:txBody>
+          <a:bodyPr wrap="square" lIns="0" tIns="0" rIns="0" bIns="0" rtlCol="0" anchor="ctr"/>
+          <a:lstStyle/>
+          <a:p>
+            <a:pPr indent="0" marL="0">
+              <a:buNone/>
+            </a:pPr>
+            <a:r>
+              <a:rPr lang="en-US" sz="1100" dirty="0">
+                <a:solidFill>
+                  <a:srgbClr val="CBD5E1"/>
+                </a:solidFill>
+                <a:latin typeface="Arial" pitchFamily="34" charset="0"/>
+                <a:ea typeface="Arial" pitchFamily="34" charset="-122"/>
+                <a:cs typeface="Arial" pitchFamily="34" charset="-120"/>
+              </a:rPr>
+              <a:t>CodeBuddy Agent SDK v0.3.43+</a:t>
+            </a:r>
+            <a:endParaRPr lang="en-US" sz="1100" dirty="0"/>
+          </a:p>
+        </p:txBody>
+      </p:sp>
+    </p:spTree>
+  </p:cSld>
+  <p:clrMapOvr>
+    <a:masterClrMapping/>
+  </p:clrMapOvr>
+</p:sld>
+</file>
+
+<file path=ppt/slides/slide12.xml><?xml version="1.0" encoding="utf-8"?>
+<p:sld xmlns:a="http://schemas.openxmlformats.org/drawingml/2006/main" xmlns:r="http://schemas.openxmlformats.org/officeDocument/2006/relationships" xmlns:p="http://schemas.openxmlformats.org/presentationml/2006/main">
+  <p:cSld name="Slide 12">
+    <p:bg>
+      <p:bgPr>
+        <a:solidFill>
+          <a:srgbClr val="0B1120"/>
+        </a:solidFill>
+      </p:bgPr>
+    </p:bg>
+    <p:spTree>
+      <p:nvGrpSpPr>
+        <p:cNvPr id="1" name=""/>
+        <p:cNvGrpSpPr/>
+        <p:nvPr/>
+      </p:nvGrpSpPr>
+      <p:grpSpPr>
+        <a:xfrm>
+          <a:off x="0" y="0"/>
+          <a:ext cx="0" cy="0"/>
+          <a:chOff x="0" y="0"/>
+          <a:chExt cx="0" cy="0"/>
+        </a:xfrm>
+      </p:grpSpPr>
+      <p:sp>
+        <p:nvSpPr>
+          <p:cNvPr id="2" name="Shape 0"/>
+          <p:cNvSpPr/>
+          <p:nvPr/>
+        </p:nvSpPr>
+        <p:spPr>
+          <a:xfrm>
+            <a:off x="0" y="0"/>
+            <a:ext cx="9144000" cy="54864"/>
+          </a:xfrm>
+          <a:prstGeom prst="rect">
+            <a:avLst/>
+          </a:prstGeom>
+          <a:solidFill>
             <a:srgbClr val="0D9488"/>
           </a:solidFill>
           <a:ln/>
@@ -3092,7 +3592,7 @@
         </p:nvPicPr>
         <p:blipFill>
           <a:blip r:embed="rId1">
-            <a:alphaModFix amt="18000"/>
+            <a:alphaModFix amt="15000"/>
           </a:blip>
           <a:stretch>
             <a:fillRect/>
@@ -3284,7 +3784,7 @@
                 <a:ea typeface="Arial" pitchFamily="34" charset="-122"/>
                 <a:cs typeface="Arial" pitchFamily="34" charset="-120"/>
               </a:rPr>
-              <a:t>三步完成贯标检测：选择模式 → 粘贴 DDL → 获取报告</a:t>
+              <a:t>选择模式 → 粘贴 DDL → AI 检测 → 获取报告 → 修正 DDL</a:t>
             </a:r>
             <a:endParaRPr lang="en-US" sz="1300" dirty="0"/>
           </a:p>
@@ -5022,7 +5522,7 @@
                   <a:srgbClr val="94A3B8"/>
                 </a:solidFill>
               </a:rPr>
-              <a:t>部分合规 — 驼峰命名问题</a:t>
+              <a:t>部分合规</a:t>
             </a:r>
             <a:endParaRPr lang="en-US" sz="1400" dirty="0"/>
           </a:p>
@@ -5056,7 +5556,7 @@
                   <a:srgbClr val="94A3B8"/>
                 </a:solidFill>
               </a:rPr>
-              <a:t>不合规 — 缺少审计字段</a:t>
+              <a:t>不合规 — 缺审计字段</a:t>
             </a:r>
             <a:endParaRPr lang="en-US" sz="1400" dirty="0"/>
           </a:p>
@@ -5124,7 +5624,7 @@
                   <a:srgbClr val="94A3B8"/>
                 </a:solidFill>
               </a:rPr>
-              <a:t>不合规 — 外键约束+无注释</a:t>
+              <a:t>不合规 — 外键+无注释</a:t>
             </a:r>
             <a:endParaRPr lang="en-US" sz="1400" dirty="0"/>
           </a:p>
@@ -5158,7 +5658,7 @@
                   <a:srgbClr val="94A3B8"/>
                 </a:solidFill>
               </a:rPr>
-              <a:t>部分合规 — 金额字段待确认</a:t>
+              <a:t>部分合规</a:t>
             </a:r>
             <a:endParaRPr lang="en-US" sz="1400" dirty="0"/>
           </a:p>
@@ -5436,7 +5936,7 @@
                 <a:ea typeface="Arial Black" pitchFamily="34" charset="-122"/>
                 <a:cs typeface="Arial Black" pitchFamily="34" charset="-120"/>
               </a:rPr>
-              <a:t>改进建议 — DDL 修正版</a:t>
+              <a:t>贯标前后 DDL 对比</a:t>
             </a:r>
             <a:endParaRPr lang="en-US" sz="2800" dirty="0"/>
           </a:p>
@@ -5473,12 +5973,12 @@
         </p:nvSpPr>
         <p:spPr>
           <a:xfrm>
-            <a:off x="274320" y="1005840"/>
-            <a:ext cx="5943600" cy="3840480"/>
+            <a:off x="274320" y="960120"/>
+            <a:ext cx="8595360" cy="2834640"/>
           </a:xfrm>
           <a:prstGeom prst="rect">
             <a:avLst>
-              <a:gd name="adj" fmla="val 1905"/>
+              <a:gd name="adj" fmla="val 2581"/>
             </a:avLst>
           </a:prstGeom>
           <a:solidFill>
@@ -5510,8 +6010,8 @@
         </p:blipFill>
         <p:spPr>
           <a:xfrm>
-            <a:off x="365760" y="1097280"/>
-            <a:ext cx="5760720" cy="3657600"/>
+            <a:off x="365760" y="1005840"/>
+            <a:ext cx="8412480" cy="2743200"/>
           </a:xfrm>
           <a:prstGeom prst="ellipse">
             <a:avLst/>
@@ -5526,12 +6026,12 @@
         </p:nvSpPr>
         <p:spPr>
           <a:xfrm>
-            <a:off x="6400800" y="1005840"/>
-            <a:ext cx="2468880" cy="3840480"/>
+            <a:off x="457200" y="3886200"/>
+            <a:ext cx="2011680" cy="1051560"/>
           </a:xfrm>
           <a:prstGeom prst="rect">
             <a:avLst>
-              <a:gd name="adj" fmla="val 2963"/>
+              <a:gd name="adj" fmla="val 6957"/>
             </a:avLst>
           </a:prstGeom>
           <a:solidFill>
@@ -5555,8 +6055,8 @@
         </p:nvSpPr>
         <p:spPr>
           <a:xfrm>
-            <a:off x="6400800" y="1005840"/>
-            <a:ext cx="73152" cy="3840480"/>
+            <a:off x="457200" y="3886200"/>
+            <a:ext cx="54864" cy="1051560"/>
           </a:xfrm>
           <a:prstGeom prst="rect">
             <a:avLst/>
@@ -5575,8 +6075,8 @@
         </p:nvSpPr>
         <p:spPr>
           <a:xfrm>
-            <a:off x="6629400" y="1097280"/>
-            <a:ext cx="2011680" cy="3566160"/>
+            <a:off x="594360" y="3931920"/>
+            <a:ext cx="1737360" cy="274320"/>
           </a:xfrm>
           <a:prstGeom prst="rect">
             <a:avLst/>
@@ -5585,255 +6085,541 @@
           <a:ln/>
         </p:spPr>
         <p:txBody>
+          <a:bodyPr wrap="square" lIns="0" tIns="0" rIns="0" bIns="0" rtlCol="0" anchor="ctr"/>
+          <a:lstStyle/>
+          <a:p>
+            <a:pPr indent="0" marL="0">
+              <a:buNone/>
+            </a:pPr>
+            <a:r>
+              <a:rPr lang="en-US" sz="1100" b="1" dirty="0">
+                <a:solidFill>
+                  <a:srgbClr val="0D9488"/>
+                </a:solidFill>
+                <a:latin typeface="Arial" pitchFamily="34" charset="0"/>
+                <a:ea typeface="Arial" pitchFamily="34" charset="-122"/>
+                <a:cs typeface="Arial" pitchFamily="34" charset="-120"/>
+              </a:rPr>
+              <a:t>命名修正</a:t>
+            </a:r>
+            <a:endParaRPr lang="en-US" sz="1100" dirty="0"/>
+          </a:p>
+        </p:txBody>
+      </p:sp>
+      <p:sp>
+        <p:nvSpPr>
+          <p:cNvPr id="10" name="Text 7"/>
+          <p:cNvSpPr/>
+          <p:nvPr/>
+        </p:nvSpPr>
+        <p:spPr>
+          <a:xfrm>
+            <a:off x="594360" y="4206240"/>
+            <a:ext cx="1737360" cy="640080"/>
+          </a:xfrm>
+          <a:prstGeom prst="rect">
+            <a:avLst/>
+          </a:prstGeom>
+          <a:noFill/>
+          <a:ln/>
+        </p:spPr>
+        <p:txBody>
           <a:bodyPr wrap="square" lIns="0" tIns="0" rIns="0" bIns="0" rtlCol="0" anchor="t"/>
           <a:lstStyle/>
           <a:p>
-            <a:pPr indent="0" marL="0">
-              <a:buNone/>
-            </a:pPr>
-            <a:r>
-              <a:rPr lang="en-US" sz="1400" b="1" dirty="0">
-                <a:solidFill>
-                  <a:srgbClr val="0D9488"/>
-                </a:solidFill>
-              </a:rPr>
-              <a:t>关键修改</a:t>
-            </a:r>
-            <a:endParaRPr lang="en-US" sz="1400" dirty="0"/>
-          </a:p>
-          <a:p>
-            <a:pPr indent="0" marL="0">
-              <a:buNone/>
-            </a:pPr>
-            <a:endParaRPr lang="en-US" sz="1400" dirty="0"/>
-          </a:p>
-          <a:p>
-            <a:pPr indent="0" marL="0">
-              <a:buNone/>
-            </a:pPr>
-            <a:r>
-              <a:rPr lang="en-US" sz="1200" b="1" dirty="0">
-                <a:solidFill>
-                  <a:srgbClr val="14B8A6"/>
-                </a:solidFill>
-              </a:rPr>
-              <a:t>命名修正</a:t>
-            </a:r>
-            <a:endParaRPr lang="en-US" sz="1400" dirty="0"/>
-          </a:p>
-          <a:p>
-            <a:pPr indent="0" marL="0">
-              <a:buNone/>
-            </a:pPr>
-            <a:r>
-              <a:rPr lang="en-US" sz="1000" dirty="0">
+            <a:pPr marL="342900" indent="-342900">
+              <a:buSzPct val="100000"/>
+              <a:buChar char="•"/>
+            </a:pPr>
+            <a:r>
+              <a:rPr lang="en-US" sz="900" dirty="0">
                 <a:solidFill>
                   <a:srgbClr val="CBD5E1"/>
                 </a:solidFill>
               </a:rPr>
               <a:t>userId → user_id</a:t>
             </a:r>
-            <a:endParaRPr lang="en-US" sz="1400" dirty="0"/>
-          </a:p>
-          <a:p>
-            <a:pPr indent="0" marL="0">
-              <a:buNone/>
-            </a:pPr>
-            <a:r>
-              <a:rPr lang="en-US" sz="1000" dirty="0">
+            <a:endParaRPr lang="en-US" sz="900" dirty="0"/>
+          </a:p>
+          <a:p>
+            <a:pPr marL="342900" indent="-342900">
+              <a:buSzPct val="100000"/>
+              <a:buChar char="•"/>
+            </a:pPr>
+            <a:r>
+              <a:rPr lang="en-US" sz="900" dirty="0">
                 <a:solidFill>
                   <a:srgbClr val="CBD5E1"/>
                 </a:solidFill>
               </a:rPr>
               <a:t>user_order → order_trade_detail</a:t>
             </a:r>
-            <a:endParaRPr lang="en-US" sz="1400" dirty="0"/>
-          </a:p>
-          <a:p>
-            <a:pPr indent="0" marL="0">
-              <a:buNone/>
-            </a:pPr>
-            <a:endParaRPr lang="en-US" sz="1400" dirty="0"/>
-          </a:p>
-          <a:p>
-            <a:pPr indent="0" marL="0">
-              <a:buNone/>
-            </a:pPr>
-            <a:r>
-              <a:rPr lang="en-US" sz="1200" b="1" dirty="0">
+            <a:endParaRPr lang="en-US" sz="900" dirty="0"/>
+          </a:p>
+        </p:txBody>
+      </p:sp>
+      <p:sp>
+        <p:nvSpPr>
+          <p:cNvPr id="11" name="Shape 8"/>
+          <p:cNvSpPr/>
+          <p:nvPr/>
+        </p:nvSpPr>
+        <p:spPr>
+          <a:xfrm>
+            <a:off x="2606040" y="3886200"/>
+            <a:ext cx="2011680" cy="1051560"/>
+          </a:xfrm>
+          <a:prstGeom prst="rect">
+            <a:avLst>
+              <a:gd name="adj" fmla="val 6957"/>
+            </a:avLst>
+          </a:prstGeom>
+          <a:solidFill>
+            <a:srgbClr val="111827"/>
+          </a:solidFill>
+          <a:ln/>
+          <a:effectLst>
+            <a:outerShdw sx="100000" sy="100000" kx="0" ky="0" algn="bl" rotWithShape="0" blurRad="76200" dist="25400" dir="8100000">
+              <a:srgbClr val="000000">
+                <a:alpha val="25000"/>
+              </a:srgbClr>
+            </a:outerShdw>
+          </a:effectLst>
+        </p:spPr>
+      </p:sp>
+      <p:sp>
+        <p:nvSpPr>
+          <p:cNvPr id="12" name="Shape 9"/>
+          <p:cNvSpPr/>
+          <p:nvPr/>
+        </p:nvSpPr>
+        <p:spPr>
+          <a:xfrm>
+            <a:off x="2606040" y="3886200"/>
+            <a:ext cx="54864" cy="1051560"/>
+          </a:xfrm>
+          <a:prstGeom prst="rect">
+            <a:avLst/>
+          </a:prstGeom>
+          <a:solidFill>
+            <a:srgbClr val="7C3AED"/>
+          </a:solidFill>
+          <a:ln/>
+        </p:spPr>
+      </p:sp>
+      <p:sp>
+        <p:nvSpPr>
+          <p:cNvPr id="13" name="Text 10"/>
+          <p:cNvSpPr/>
+          <p:nvPr/>
+        </p:nvSpPr>
+        <p:spPr>
+          <a:xfrm>
+            <a:off x="2743200" y="3931920"/>
+            <a:ext cx="1737360" cy="274320"/>
+          </a:xfrm>
+          <a:prstGeom prst="rect">
+            <a:avLst/>
+          </a:prstGeom>
+          <a:noFill/>
+          <a:ln/>
+        </p:spPr>
+        <p:txBody>
+          <a:bodyPr wrap="square" lIns="0" tIns="0" rIns="0" bIns="0" rtlCol="0" anchor="ctr"/>
+          <a:lstStyle/>
+          <a:p>
+            <a:pPr indent="0" marL="0">
+              <a:buNone/>
+            </a:pPr>
+            <a:r>
+              <a:rPr lang="en-US" sz="1100" b="1" dirty="0">
                 <a:solidFill>
                   <a:srgbClr val="7C3AED"/>
                 </a:solidFill>
+                <a:latin typeface="Arial" pitchFamily="34" charset="0"/>
+                <a:ea typeface="Arial" pitchFamily="34" charset="-122"/>
+                <a:cs typeface="Arial" pitchFamily="34" charset="-120"/>
               </a:rPr>
               <a:t>类型修正</a:t>
             </a:r>
-            <a:endParaRPr lang="en-US" sz="1400" dirty="0"/>
-          </a:p>
-          <a:p>
-            <a:pPr indent="0" marL="0">
-              <a:buNone/>
-            </a:pPr>
-            <a:r>
-              <a:rPr lang="en-US" sz="1000" dirty="0">
+            <a:endParaRPr lang="en-US" sz="1100" dirty="0"/>
+          </a:p>
+        </p:txBody>
+      </p:sp>
+      <p:sp>
+        <p:nvSpPr>
+          <p:cNvPr id="14" name="Text 11"/>
+          <p:cNvSpPr/>
+          <p:nvPr/>
+        </p:nvSpPr>
+        <p:spPr>
+          <a:xfrm>
+            <a:off x="2743200" y="4206240"/>
+            <a:ext cx="1737360" cy="640080"/>
+          </a:xfrm>
+          <a:prstGeom prst="rect">
+            <a:avLst/>
+          </a:prstGeom>
+          <a:noFill/>
+          <a:ln/>
+        </p:spPr>
+        <p:txBody>
+          <a:bodyPr wrap="square" lIns="0" tIns="0" rIns="0" bIns="0" rtlCol="0" anchor="t"/>
+          <a:lstStyle/>
+          <a:p>
+            <a:pPr marL="342900" indent="-342900">
+              <a:buSzPct val="100000"/>
+              <a:buChar char="•"/>
+            </a:pPr>
+            <a:r>
+              <a:rPr lang="en-US" sz="900" dirty="0">
                 <a:solidFill>
                   <a:srgbClr val="CBD5E1"/>
                 </a:solidFill>
               </a:rPr>
               <a:t>id INT → BIGINT</a:t>
             </a:r>
-            <a:endParaRPr lang="en-US" sz="1400" dirty="0"/>
-          </a:p>
-          <a:p>
-            <a:pPr indent="0" marL="0">
-              <a:buNone/>
-            </a:pPr>
-            <a:r>
-              <a:rPr lang="en-US" sz="1000" dirty="0">
+            <a:endParaRPr lang="en-US" sz="900" dirty="0"/>
+          </a:p>
+          <a:p>
+            <a:pPr marL="342900" indent="-342900">
+              <a:buSzPct val="100000"/>
+              <a:buChar char="•"/>
+            </a:pPr>
+            <a:r>
+              <a:rPr lang="en-US" sz="900" dirty="0">
                 <a:solidFill>
                   <a:srgbClr val="CBD5E1"/>
                 </a:solidFill>
               </a:rPr>
               <a:t>ENUM → TINYINT</a:t>
             </a:r>
-            <a:endParaRPr lang="en-US" sz="1400" dirty="0"/>
-          </a:p>
-          <a:p>
-            <a:pPr indent="0" marL="0">
-              <a:buNone/>
-            </a:pPr>
-            <a:endParaRPr lang="en-US" sz="1400" dirty="0"/>
-          </a:p>
-          <a:p>
-            <a:pPr indent="0" marL="0">
-              <a:buNone/>
-            </a:pPr>
-            <a:r>
-              <a:rPr lang="en-US" sz="1200" b="1" dirty="0">
+            <a:endParaRPr lang="en-US" sz="900" dirty="0"/>
+          </a:p>
+          <a:p>
+            <a:pPr marL="342900" indent="-342900">
+              <a:buSzPct val="100000"/>
+              <a:buChar char="•"/>
+            </a:pPr>
+            <a:r>
+              <a:rPr lang="en-US" sz="900" dirty="0">
+                <a:solidFill>
+                  <a:srgbClr val="CBD5E1"/>
+                </a:solidFill>
+              </a:rPr>
+              <a:t>DECIMAL(10,2) → (18,2)</a:t>
+            </a:r>
+            <a:endParaRPr lang="en-US" sz="900" dirty="0"/>
+          </a:p>
+        </p:txBody>
+      </p:sp>
+      <p:sp>
+        <p:nvSpPr>
+          <p:cNvPr id="15" name="Shape 12"/>
+          <p:cNvSpPr/>
+          <p:nvPr/>
+        </p:nvSpPr>
+        <p:spPr>
+          <a:xfrm>
+            <a:off x="4754880" y="3886200"/>
+            <a:ext cx="2011680" cy="1051560"/>
+          </a:xfrm>
+          <a:prstGeom prst="rect">
+            <a:avLst>
+              <a:gd name="adj" fmla="val 6957"/>
+            </a:avLst>
+          </a:prstGeom>
+          <a:solidFill>
+            <a:srgbClr val="111827"/>
+          </a:solidFill>
+          <a:ln/>
+          <a:effectLst>
+            <a:outerShdw sx="100000" sy="100000" kx="0" ky="0" algn="bl" rotWithShape="0" blurRad="76200" dist="25400" dir="8100000">
+              <a:srgbClr val="000000">
+                <a:alpha val="25000"/>
+              </a:srgbClr>
+            </a:outerShdw>
+          </a:effectLst>
+        </p:spPr>
+      </p:sp>
+      <p:sp>
+        <p:nvSpPr>
+          <p:cNvPr id="16" name="Shape 13"/>
+          <p:cNvSpPr/>
+          <p:nvPr/>
+        </p:nvSpPr>
+        <p:spPr>
+          <a:xfrm>
+            <a:off x="4754880" y="3886200"/>
+            <a:ext cx="54864" cy="1051560"/>
+          </a:xfrm>
+          <a:prstGeom prst="rect">
+            <a:avLst/>
+          </a:prstGeom>
+          <a:solidFill>
+            <a:srgbClr val="EA580C"/>
+          </a:solidFill>
+          <a:ln/>
+        </p:spPr>
+      </p:sp>
+      <p:sp>
+        <p:nvSpPr>
+          <p:cNvPr id="17" name="Text 14"/>
+          <p:cNvSpPr/>
+          <p:nvPr/>
+        </p:nvSpPr>
+        <p:spPr>
+          <a:xfrm>
+            <a:off x="4892040" y="3931920"/>
+            <a:ext cx="1737360" cy="274320"/>
+          </a:xfrm>
+          <a:prstGeom prst="rect">
+            <a:avLst/>
+          </a:prstGeom>
+          <a:noFill/>
+          <a:ln/>
+        </p:spPr>
+        <p:txBody>
+          <a:bodyPr wrap="square" lIns="0" tIns="0" rIns="0" bIns="0" rtlCol="0" anchor="ctr"/>
+          <a:lstStyle/>
+          <a:p>
+            <a:pPr indent="0" marL="0">
+              <a:buNone/>
+            </a:pPr>
+            <a:r>
+              <a:rPr lang="en-US" sz="1100" b="1" dirty="0">
                 <a:solidFill>
                   <a:srgbClr val="EA580C"/>
                 </a:solidFill>
-              </a:rPr>
-              <a:t>新增字段</a:t>
-            </a:r>
-            <a:endParaRPr lang="en-US" sz="1400" dirty="0"/>
-          </a:p>
-          <a:p>
-            <a:pPr indent="0" marL="0">
-              <a:buNone/>
-            </a:pPr>
-            <a:r>
-              <a:rPr lang="en-US" sz="1000" dirty="0">
+                <a:latin typeface="Arial" pitchFamily="34" charset="0"/>
+                <a:ea typeface="Arial" pitchFamily="34" charset="-122"/>
+                <a:cs typeface="Arial" pitchFamily="34" charset="-120"/>
+              </a:rPr>
+              <a:t>新增审计字段</a:t>
+            </a:r>
+            <a:endParaRPr lang="en-US" sz="1100" dirty="0"/>
+          </a:p>
+        </p:txBody>
+      </p:sp>
+      <p:sp>
+        <p:nvSpPr>
+          <p:cNvPr id="18" name="Text 15"/>
+          <p:cNvSpPr/>
+          <p:nvPr/>
+        </p:nvSpPr>
+        <p:spPr>
+          <a:xfrm>
+            <a:off x="4892040" y="4206240"/>
+            <a:ext cx="1737360" cy="640080"/>
+          </a:xfrm>
+          <a:prstGeom prst="rect">
+            <a:avLst/>
+          </a:prstGeom>
+          <a:noFill/>
+          <a:ln/>
+        </p:spPr>
+        <p:txBody>
+          <a:bodyPr wrap="square" lIns="0" tIns="0" rIns="0" bIns="0" rtlCol="0" anchor="t"/>
+          <a:lstStyle/>
+          <a:p>
+            <a:pPr marL="342900" indent="-342900">
+              <a:buSzPct val="100000"/>
+              <a:buChar char="•"/>
+            </a:pPr>
+            <a:r>
+              <a:rPr lang="en-US" sz="900" dirty="0">
                 <a:solidFill>
                   <a:srgbClr val="CBD5E1"/>
                 </a:solidFill>
               </a:rPr>
-              <a:t>updated_time</a:t>
-            </a:r>
-            <a:endParaRPr lang="en-US" sz="1400" dirty="0"/>
-          </a:p>
-          <a:p>
-            <a:pPr indent="0" marL="0">
-              <a:buNone/>
-            </a:pPr>
-            <a:r>
-              <a:rPr lang="en-US" sz="1000" dirty="0">
+              <a:t>+ updated_time</a:t>
+            </a:r>
+            <a:endParaRPr lang="en-US" sz="900" dirty="0"/>
+          </a:p>
+          <a:p>
+            <a:pPr marL="342900" indent="-342900">
+              <a:buSzPct val="100000"/>
+              <a:buChar char="•"/>
+            </a:pPr>
+            <a:r>
+              <a:rPr lang="en-US" sz="900" dirty="0">
                 <a:solidFill>
                   <a:srgbClr val="CBD5E1"/>
                 </a:solidFill>
               </a:rPr>
-              <a:t>created_by</a:t>
-            </a:r>
-            <a:endParaRPr lang="en-US" sz="1400" dirty="0"/>
-          </a:p>
-          <a:p>
-            <a:pPr indent="0" marL="0">
-              <a:buNone/>
-            </a:pPr>
-            <a:r>
-              <a:rPr lang="en-US" sz="1000" dirty="0">
+              <a:t>+ created_by</a:t>
+            </a:r>
+            <a:endParaRPr lang="en-US" sz="900" dirty="0"/>
+          </a:p>
+          <a:p>
+            <a:pPr marL="342900" indent="-342900">
+              <a:buSzPct val="100000"/>
+              <a:buChar char="•"/>
+            </a:pPr>
+            <a:r>
+              <a:rPr lang="en-US" sz="900" dirty="0">
                 <a:solidFill>
                   <a:srgbClr val="CBD5E1"/>
                 </a:solidFill>
               </a:rPr>
-              <a:t>updated_by</a:t>
-            </a:r>
-            <a:endParaRPr lang="en-US" sz="1400" dirty="0"/>
-          </a:p>
-          <a:p>
-            <a:pPr indent="0" marL="0">
-              <a:buNone/>
-            </a:pPr>
-            <a:endParaRPr lang="en-US" sz="1400" dirty="0"/>
-          </a:p>
-          <a:p>
-            <a:pPr indent="0" marL="0">
-              <a:buNone/>
-            </a:pPr>
-            <a:r>
-              <a:rPr lang="en-US" sz="1200" b="1" dirty="0">
+              <a:t>+ updated_by</a:t>
+            </a:r>
+            <a:endParaRPr lang="en-US" sz="900" dirty="0"/>
+          </a:p>
+        </p:txBody>
+      </p:sp>
+      <p:sp>
+        <p:nvSpPr>
+          <p:cNvPr id="19" name="Shape 16"/>
+          <p:cNvSpPr/>
+          <p:nvPr/>
+        </p:nvSpPr>
+        <p:spPr>
+          <a:xfrm>
+            <a:off x="6903720" y="3886200"/>
+            <a:ext cx="2011680" cy="1051560"/>
+          </a:xfrm>
+          <a:prstGeom prst="rect">
+            <a:avLst>
+              <a:gd name="adj" fmla="val 6957"/>
+            </a:avLst>
+          </a:prstGeom>
+          <a:solidFill>
+            <a:srgbClr val="111827"/>
+          </a:solidFill>
+          <a:ln/>
+          <a:effectLst>
+            <a:outerShdw sx="100000" sy="100000" kx="0" ky="0" algn="bl" rotWithShape="0" blurRad="76200" dist="25400" dir="8100000">
+              <a:srgbClr val="000000">
+                <a:alpha val="25000"/>
+              </a:srgbClr>
+            </a:outerShdw>
+          </a:effectLst>
+        </p:spPr>
+      </p:sp>
+      <p:sp>
+        <p:nvSpPr>
+          <p:cNvPr id="20" name="Shape 17"/>
+          <p:cNvSpPr/>
+          <p:nvPr/>
+        </p:nvSpPr>
+        <p:spPr>
+          <a:xfrm>
+            <a:off x="6903720" y="3886200"/>
+            <a:ext cx="54864" cy="1051560"/>
+          </a:xfrm>
+          <a:prstGeom prst="rect">
+            <a:avLst/>
+          </a:prstGeom>
+          <a:solidFill>
+            <a:srgbClr val="F59E0B"/>
+          </a:solidFill>
+          <a:ln/>
+        </p:spPr>
+      </p:sp>
+      <p:sp>
+        <p:nvSpPr>
+          <p:cNvPr id="21" name="Text 18"/>
+          <p:cNvSpPr/>
+          <p:nvPr/>
+        </p:nvSpPr>
+        <p:spPr>
+          <a:xfrm>
+            <a:off x="7040880" y="3931920"/>
+            <a:ext cx="1737360" cy="274320"/>
+          </a:xfrm>
+          <a:prstGeom prst="rect">
+            <a:avLst/>
+          </a:prstGeom>
+          <a:noFill/>
+          <a:ln/>
+        </p:spPr>
+        <p:txBody>
+          <a:bodyPr wrap="square" lIns="0" tIns="0" rIns="0" bIns="0" rtlCol="0" anchor="ctr"/>
+          <a:lstStyle/>
+          <a:p>
+            <a:pPr indent="0" marL="0">
+              <a:buNone/>
+            </a:pPr>
+            <a:r>
+              <a:rPr lang="en-US" sz="1100" b="1" dirty="0">
                 <a:solidFill>
                   <a:srgbClr val="F59E0B"/>
                 </a:solidFill>
-              </a:rPr>
-              <a:t>其他修正</a:t>
-            </a:r>
-            <a:endParaRPr lang="en-US" sz="1400" dirty="0"/>
-          </a:p>
-          <a:p>
-            <a:pPr indent="0" marL="0">
-              <a:buNone/>
-            </a:pPr>
-            <a:r>
-              <a:rPr lang="en-US" sz="1000" dirty="0">
+                <a:latin typeface="Arial" pitchFamily="34" charset="0"/>
+                <a:ea typeface="Arial" pitchFamily="34" charset="-122"/>
+                <a:cs typeface="Arial" pitchFamily="34" charset="-120"/>
+              </a:rPr>
+              <a:t>设计修正</a:t>
+            </a:r>
+            <a:endParaRPr lang="en-US" sz="1100" dirty="0"/>
+          </a:p>
+        </p:txBody>
+      </p:sp>
+      <p:sp>
+        <p:nvSpPr>
+          <p:cNvPr id="22" name="Text 19"/>
+          <p:cNvSpPr/>
+          <p:nvPr/>
+        </p:nvSpPr>
+        <p:spPr>
+          <a:xfrm>
+            <a:off x="7040880" y="4206240"/>
+            <a:ext cx="1737360" cy="640080"/>
+          </a:xfrm>
+          <a:prstGeom prst="rect">
+            <a:avLst/>
+          </a:prstGeom>
+          <a:noFill/>
+          <a:ln/>
+        </p:spPr>
+        <p:txBody>
+          <a:bodyPr wrap="square" lIns="0" tIns="0" rIns="0" bIns="0" rtlCol="0" anchor="t"/>
+          <a:lstStyle/>
+          <a:p>
+            <a:pPr marL="342900" indent="-342900">
+              <a:buSzPct val="100000"/>
+              <a:buChar char="•"/>
+            </a:pPr>
+            <a:r>
+              <a:rPr lang="en-US" sz="900" dirty="0">
                 <a:solidFill>
                   <a:srgbClr val="CBD5E1"/>
                 </a:solidFill>
               </a:rPr>
-              <a:t>移除外键约束</a:t>
-            </a:r>
-            <a:endParaRPr lang="en-US" sz="1400" dirty="0"/>
-          </a:p>
-          <a:p>
-            <a:pPr indent="0" marL="0">
-              <a:buNone/>
-            </a:pPr>
-            <a:r>
-              <a:rPr lang="en-US" sz="1000" dirty="0">
+              <a:t>移除 FOREIGN KEY</a:t>
+            </a:r>
+            <a:endParaRPr lang="en-US" sz="900" dirty="0"/>
+          </a:p>
+          <a:p>
+            <a:pPr marL="342900" indent="-342900">
+              <a:buSzPct val="100000"/>
+              <a:buChar char="•"/>
+            </a:pPr>
+            <a:r>
+              <a:rPr lang="en-US" sz="900" dirty="0">
                 <a:solidFill>
                   <a:srgbClr val="CBD5E1"/>
                 </a:solidFill>
               </a:rPr>
-              <a:t>添加 COMMENT</a:t>
-            </a:r>
-            <a:endParaRPr lang="en-US" sz="1400" dirty="0"/>
-          </a:p>
-          <a:p>
-            <a:pPr indent="0" marL="0">
-              <a:buNone/>
-            </a:pPr>
-            <a:r>
-              <a:rPr lang="en-US" sz="1000" dirty="0">
+              <a:t>+ COMMENT 注释</a:t>
+            </a:r>
+            <a:endParaRPr lang="en-US" sz="900" dirty="0"/>
+          </a:p>
+          <a:p>
+            <a:pPr marL="342900" indent="-342900">
+              <a:buSzPct val="100000"/>
+              <a:buChar char="•"/>
+            </a:pPr>
+            <a:r>
+              <a:rPr lang="en-US" sz="900" dirty="0">
                 <a:solidFill>
                   <a:srgbClr val="CBD5E1"/>
                 </a:solidFill>
               </a:rPr>
-              <a:t>添加索引命名</a:t>
-            </a:r>
-            <a:endParaRPr lang="en-US" sz="1400" dirty="0"/>
-          </a:p>
-          <a:p>
-            <a:pPr indent="0" marL="0">
-              <a:buNone/>
-            </a:pPr>
-            <a:r>
-              <a:rPr lang="en-US" sz="1000" dirty="0">
-                <a:solidFill>
-                  <a:srgbClr val="CBD5E1"/>
-                </a:solidFill>
-              </a:rPr>
-              <a:t>指定 utf8mb4</a:t>
-            </a:r>
-            <a:endParaRPr lang="en-US" sz="1400" dirty="0"/>
+              <a:t>+ utf8mb4</a:t>
+            </a:r>
+            <a:endParaRPr lang="en-US" sz="900" dirty="0"/>
           </a:p>
         </p:txBody>
       </p:sp>
@@ -5884,7 +6670,7 @@
             <a:avLst/>
           </a:prstGeom>
           <a:solidFill>
-            <a:srgbClr val="7C3AED"/>
+            <a:srgbClr val="EA580C"/>
           </a:solidFill>
           <a:ln/>
         </p:spPr>
@@ -5922,7 +6708,7 @@
                 <a:ea typeface="Arial Black" pitchFamily="34" charset="-122"/>
                 <a:cs typeface="Arial Black" pitchFamily="34" charset="-120"/>
               </a:rPr>
-              <a:t>其他检测模式</a:t>
+              <a:t>16 项关键修改清单</a:t>
             </a:r>
             <a:endParaRPr lang="en-US" sz="2800" dirty="0"/>
           </a:p>
@@ -5959,16 +6745,16 @@
         </p:nvSpPr>
         <p:spPr>
           <a:xfrm>
-            <a:off x="731520" y="1097280"/>
-            <a:ext cx="3886200" cy="3474720"/>
+            <a:off x="274320" y="960120"/>
+            <a:ext cx="8595360" cy="3931920"/>
           </a:xfrm>
           <a:prstGeom prst="rect">
             <a:avLst>
-              <a:gd name="adj" fmla="val 2105"/>
+              <a:gd name="adj" fmla="val 1860"/>
             </a:avLst>
           </a:prstGeom>
           <a:solidFill>
-            <a:srgbClr val="111827"/>
+            <a:srgbClr val="1E293B"/>
           </a:solidFill>
           <a:ln/>
           <a:effectLst>
@@ -5980,68 +6766,9 @@
           </a:effectLst>
         </p:spPr>
       </p:sp>
-      <p:sp>
-        <p:nvSpPr>
-          <p:cNvPr id="6" name="Shape 4"/>
-          <p:cNvSpPr/>
-          <p:nvPr/>
-        </p:nvSpPr>
-        <p:spPr>
-          <a:xfrm>
-            <a:off x="731520" y="1097280"/>
-            <a:ext cx="3886200" cy="54864"/>
-          </a:xfrm>
-          <a:prstGeom prst="rect">
-            <a:avLst/>
-          </a:prstGeom>
-          <a:solidFill>
-            <a:srgbClr val="7C3AED"/>
-          </a:solidFill>
-          <a:ln/>
-        </p:spPr>
-      </p:sp>
-      <p:sp>
-        <p:nvSpPr>
-          <p:cNvPr id="7" name="Text 5"/>
-          <p:cNvSpPr/>
-          <p:nvPr/>
-        </p:nvSpPr>
-        <p:spPr>
-          <a:xfrm>
-            <a:off x="868680" y="1188720"/>
-            <a:ext cx="3566160" cy="320040"/>
-          </a:xfrm>
-          <a:prstGeom prst="rect">
-            <a:avLst/>
-          </a:prstGeom>
-          <a:noFill/>
-          <a:ln/>
-        </p:spPr>
-        <p:txBody>
-          <a:bodyPr wrap="square" lIns="0" tIns="0" rIns="0" bIns="0" rtlCol="0" anchor="ctr"/>
-          <a:lstStyle/>
-          <a:p>
-            <a:pPr indent="0" marL="0">
-              <a:buNone/>
-            </a:pPr>
-            <a:r>
-              <a:rPr lang="en-US" sz="1600" b="1" dirty="0">
-                <a:solidFill>
-                  <a:srgbClr val="7C3AED"/>
-                </a:solidFill>
-                <a:latin typeface="Arial" pitchFamily="34" charset="0"/>
-                <a:ea typeface="Arial" pitchFamily="34" charset="-122"/>
-                <a:cs typeface="Arial" pitchFamily="34" charset="-120"/>
-              </a:rPr>
-              <a:t>贯标规则配置</a:t>
-            </a:r>
-            <a:endParaRPr lang="en-US" sz="1600" dirty="0"/>
-          </a:p>
-        </p:txBody>
-      </p:sp>
       <p:pic>
         <p:nvPicPr>
-          <p:cNvPr id="8" name="Image 0" descr="preencoded.png">    </p:cNvPr>
+          <p:cNvPr id="6" name="Image 0" descr="preencoded.png">    </p:cNvPr>
           <p:cNvPicPr>
             <a:picLocks noChangeAspect="1"/>
           </p:cNvPicPr>
@@ -6055,238 +6782,14 @@
         </p:blipFill>
         <p:spPr>
           <a:xfrm>
-            <a:off x="868680" y="1600200"/>
-            <a:ext cx="3566160" cy="2103120"/>
+            <a:off x="365760" y="1005840"/>
+            <a:ext cx="8412480" cy="3840480"/>
           </a:xfrm>
           <a:prstGeom prst="ellipse">
             <a:avLst/>
           </a:prstGeom>
         </p:spPr>
       </p:pic>
-      <p:sp>
-        <p:nvSpPr>
-          <p:cNvPr id="9" name="Text 6"/>
-          <p:cNvSpPr/>
-          <p:nvPr/>
-        </p:nvSpPr>
-        <p:spPr>
-          <a:xfrm>
-            <a:off x="868680" y="3794760"/>
-            <a:ext cx="3566160" cy="548640"/>
-          </a:xfrm>
-          <a:prstGeom prst="rect">
-            <a:avLst/>
-          </a:prstGeom>
-          <a:noFill/>
-          <a:ln/>
-        </p:spPr>
-        <p:txBody>
-          <a:bodyPr wrap="square" lIns="0" tIns="0" rIns="0" bIns="0" rtlCol="0" anchor="ctr"/>
-          <a:lstStyle/>
-          <a:p>
-            <a:pPr indent="0" marL="0">
-              <a:buNone/>
-            </a:pPr>
-            <a:r>
-              <a:rPr lang="en-US" sz="1100" dirty="0">
-                <a:solidFill>
-                  <a:srgbClr val="CBD5E1"/>
-                </a:solidFill>
-                <a:latin typeface="Arial" pitchFamily="34" charset="0"/>
-                <a:ea typeface="Arial" pitchFamily="34" charset="-122"/>
-                <a:cs typeface="Arial" pitchFamily="34" charset="-120"/>
-              </a:rPr>
-              <a:t>自定义检测规则体系</a:t>
-            </a:r>
-            <a:endParaRPr lang="en-US" sz="1100" dirty="0"/>
-          </a:p>
-          <a:p>
-            <a:pPr indent="0" marL="0">
-              <a:buNone/>
-            </a:pPr>
-            <a:r>
-              <a:rPr lang="en-US" sz="1100" dirty="0">
-                <a:solidFill>
-                  <a:srgbClr val="CBD5E1"/>
-                </a:solidFill>
-                <a:latin typeface="Arial" pitchFamily="34" charset="0"/>
-                <a:ea typeface="Arial" pitchFamily="34" charset="-122"/>
-                <a:cs typeface="Arial" pitchFamily="34" charset="-120"/>
-              </a:rPr>
-              <a:t>规则配置 JSON/YAML 导出</a:t>
-            </a:r>
-            <a:endParaRPr lang="en-US" sz="1100" dirty="0"/>
-          </a:p>
-        </p:txBody>
-      </p:sp>
-      <p:sp>
-        <p:nvSpPr>
-          <p:cNvPr id="10" name="Shape 7"/>
-          <p:cNvSpPr/>
-          <p:nvPr/>
-        </p:nvSpPr>
-        <p:spPr>
-          <a:xfrm>
-            <a:off x="4892040" y="1097280"/>
-            <a:ext cx="3886200" cy="3474720"/>
-          </a:xfrm>
-          <a:prstGeom prst="rect">
-            <a:avLst>
-              <a:gd name="adj" fmla="val 2105"/>
-            </a:avLst>
-          </a:prstGeom>
-          <a:solidFill>
-            <a:srgbClr val="111827"/>
-          </a:solidFill>
-          <a:ln/>
-          <a:effectLst>
-            <a:outerShdw sx="100000" sy="100000" kx="0" ky="0" algn="bl" rotWithShape="0" blurRad="76200" dist="25400" dir="8100000">
-              <a:srgbClr val="000000">
-                <a:alpha val="25000"/>
-              </a:srgbClr>
-            </a:outerShdw>
-          </a:effectLst>
-        </p:spPr>
-      </p:sp>
-      <p:sp>
-        <p:nvSpPr>
-          <p:cNvPr id="11" name="Shape 8"/>
-          <p:cNvSpPr/>
-          <p:nvPr/>
-        </p:nvSpPr>
-        <p:spPr>
-          <a:xfrm>
-            <a:off x="4892040" y="1097280"/>
-            <a:ext cx="3886200" cy="54864"/>
-          </a:xfrm>
-          <a:prstGeom prst="rect">
-            <a:avLst/>
-          </a:prstGeom>
-          <a:solidFill>
-            <a:srgbClr val="EA580C"/>
-          </a:solidFill>
-          <a:ln/>
-        </p:spPr>
-      </p:sp>
-      <p:sp>
-        <p:nvSpPr>
-          <p:cNvPr id="12" name="Text 9"/>
-          <p:cNvSpPr/>
-          <p:nvPr/>
-        </p:nvSpPr>
-        <p:spPr>
-          <a:xfrm>
-            <a:off x="5029200" y="1188720"/>
-            <a:ext cx="3566160" cy="320040"/>
-          </a:xfrm>
-          <a:prstGeom prst="rect">
-            <a:avLst/>
-          </a:prstGeom>
-          <a:noFill/>
-          <a:ln/>
-        </p:spPr>
-        <p:txBody>
-          <a:bodyPr wrap="square" lIns="0" tIns="0" rIns="0" bIns="0" rtlCol="0" anchor="ctr"/>
-          <a:lstStyle/>
-          <a:p>
-            <a:pPr indent="0" marL="0">
-              <a:buNone/>
-            </a:pPr>
-            <a:r>
-              <a:rPr lang="en-US" sz="1600" b="1" dirty="0">
-                <a:solidFill>
-                  <a:srgbClr val="EA580C"/>
-                </a:solidFill>
-                <a:latin typeface="Arial" pitchFamily="34" charset="0"/>
-                <a:ea typeface="Arial" pitchFamily="34" charset="-122"/>
-                <a:cs typeface="Arial" pitchFamily="34" charset="-120"/>
-              </a:rPr>
-              <a:t>DDL 解析分析</a:t>
-            </a:r>
-            <a:endParaRPr lang="en-US" sz="1600" dirty="0"/>
-          </a:p>
-        </p:txBody>
-      </p:sp>
-      <p:pic>
-        <p:nvPicPr>
-          <p:cNvPr id="13" name="Image 1" descr="preencoded.png">    </p:cNvPr>
-          <p:cNvPicPr>
-            <a:picLocks noChangeAspect="1"/>
-          </p:cNvPicPr>
-          <p:nvPr/>
-        </p:nvPicPr>
-        <p:blipFill>
-          <a:blip r:embed="rId2"/>
-          <a:stretch>
-            <a:fillRect/>
-          </a:stretch>
-        </p:blipFill>
-        <p:spPr>
-          <a:xfrm>
-            <a:off x="5029200" y="1600200"/>
-            <a:ext cx="3566160" cy="2103120"/>
-          </a:xfrm>
-          <a:prstGeom prst="ellipse">
-            <a:avLst/>
-          </a:prstGeom>
-        </p:spPr>
-      </p:pic>
-      <p:sp>
-        <p:nvSpPr>
-          <p:cNvPr id="14" name="Text 10"/>
-          <p:cNvSpPr/>
-          <p:nvPr/>
-        </p:nvSpPr>
-        <p:spPr>
-          <a:xfrm>
-            <a:off x="5029200" y="3794760"/>
-            <a:ext cx="3566160" cy="548640"/>
-          </a:xfrm>
-          <a:prstGeom prst="rect">
-            <a:avLst/>
-          </a:prstGeom>
-          <a:noFill/>
-          <a:ln/>
-        </p:spPr>
-        <p:txBody>
-          <a:bodyPr wrap="square" lIns="0" tIns="0" rIns="0" bIns="0" rtlCol="0" anchor="ctr"/>
-          <a:lstStyle/>
-          <a:p>
-            <a:pPr indent="0" marL="0">
-              <a:buNone/>
-            </a:pPr>
-            <a:r>
-              <a:rPr lang="en-US" sz="1100" dirty="0">
-                <a:solidFill>
-                  <a:srgbClr val="CBD5E1"/>
-                </a:solidFill>
-                <a:latin typeface="Arial" pitchFamily="34" charset="0"/>
-                <a:ea typeface="Arial" pitchFamily="34" charset="-122"/>
-                <a:cs typeface="Arial" pitchFamily="34" charset="-120"/>
-              </a:rPr>
-              <a:t>解析 SQL DDL 提取表结构</a:t>
-            </a:r>
-            <a:endParaRPr lang="en-US" sz="1100" dirty="0"/>
-          </a:p>
-          <a:p>
-            <a:pPr indent="0" marL="0">
-              <a:buNone/>
-            </a:pPr>
-            <a:r>
-              <a:rPr lang="en-US" sz="1100" dirty="0">
-                <a:solidFill>
-                  <a:srgbClr val="CBD5E1"/>
-                </a:solidFill>
-                <a:latin typeface="Arial" pitchFamily="34" charset="0"/>
-                <a:ea typeface="Arial" pitchFamily="34" charset="-122"/>
-                <a:cs typeface="Arial" pitchFamily="34" charset="-120"/>
-              </a:rPr>
-              <a:t>字段/索引/约束格式化展示</a:t>
-            </a:r>
-            <a:endParaRPr lang="en-US" sz="1100" dirty="0"/>
-          </a:p>
-        </p:txBody>
-      </p:sp>
     </p:spTree>
   </p:cSld>
   <p:clrMapOvr>
